--- a/doc/003-middleware-database.pptx
+++ b/doc/003-middleware-database.pptx
@@ -151,23 +151,75 @@
 </p:presentation>
 </file>
 
-<file path=ppt/revisionInfo.xml><?xml version="1.0" encoding="utf-8"?>
-<p1510:revInfo xmlns:a="http://schemas.openxmlformats.org/drawingml/2006/main" xmlns:r="http://schemas.openxmlformats.org/officeDocument/2006/relationships" xmlns:p1510="http://schemas.microsoft.com/office/powerpoint/2015/10/main">
-  <p1510:revLst>
-    <p1510:client id="{C75024F2-F5A5-484E-BD7B-BE86A19306A6}" v="1" dt="2026-05-16T13:10:40.049"/>
-  </p1510:revLst>
-</p1510:revInfo>
-</file>
-
 <file path=ppt/changesInfos/changesInfo1.xml><?xml version="1.0" encoding="utf-8"?>
 <pc:chgInfo xmlns:a="http://schemas.openxmlformats.org/drawingml/2006/main" xmlns:r="http://schemas.openxmlformats.org/officeDocument/2006/relationships" xmlns:ac="http://schemas.microsoft.com/office/drawing/2013/main/command" xmlns:pc="http://schemas.microsoft.com/office/powerpoint/2013/main/command">
   <pc:docChgLst>
     <pc:chgData name="Massimo Petrolati" userId="e7daa978-26e3-4c4e-8847-ea9e36559ae5" providerId="ADAL" clId="{A7182F9C-EEA7-476B-8E0E-53730D456657}"/>
     <pc:docChg chg="addSld modSld sldOrd">
-      <pc:chgData name="Massimo Petrolati" userId="e7daa978-26e3-4c4e-8847-ea9e36559ae5" providerId="ADAL" clId="{A7182F9C-EEA7-476B-8E0E-53730D456657}" dt="2026-05-16T13:11:10.498" v="53" actId="404"/>
+      <pc:chgData name="Massimo Petrolati" userId="e7daa978-26e3-4c4e-8847-ea9e36559ae5" providerId="ADAL" clId="{A7182F9C-EEA7-476B-8E0E-53730D456657}" dt="2026-05-24T23:38:40.061" v="91" actId="20577"/>
       <pc:docMkLst>
         <pc:docMk/>
       </pc:docMkLst>
+      <pc:sldChg chg="modSp mod">
+        <pc:chgData name="Massimo Petrolati" userId="e7daa978-26e3-4c4e-8847-ea9e36559ae5" providerId="ADAL" clId="{A7182F9C-EEA7-476B-8E0E-53730D456657}" dt="2026-05-24T23:20:43.648" v="66" actId="20577"/>
+        <pc:sldMkLst>
+          <pc:docMk/>
+          <pc:sldMk cId="0" sldId="272"/>
+        </pc:sldMkLst>
+        <pc:spChg chg="mod">
+          <ac:chgData name="Massimo Petrolati" userId="e7daa978-26e3-4c4e-8847-ea9e36559ae5" providerId="ADAL" clId="{A7182F9C-EEA7-476B-8E0E-53730D456657}" dt="2026-05-24T23:20:43.648" v="66" actId="20577"/>
+          <ac:spMkLst>
+            <pc:docMk/>
+            <pc:sldMk cId="0" sldId="272"/>
+            <ac:spMk id="19" creationId="{00000000-0000-0000-0000-000000000000}"/>
+          </ac:spMkLst>
+        </pc:spChg>
+      </pc:sldChg>
+      <pc:sldChg chg="modSp mod">
+        <pc:chgData name="Massimo Petrolati" userId="e7daa978-26e3-4c4e-8847-ea9e36559ae5" providerId="ADAL" clId="{A7182F9C-EEA7-476B-8E0E-53730D456657}" dt="2026-05-24T23:38:40.061" v="91" actId="20577"/>
+        <pc:sldMkLst>
+          <pc:docMk/>
+          <pc:sldMk cId="0" sldId="281"/>
+        </pc:sldMkLst>
+        <pc:spChg chg="mod">
+          <ac:chgData name="Massimo Petrolati" userId="e7daa978-26e3-4c4e-8847-ea9e36559ae5" providerId="ADAL" clId="{A7182F9C-EEA7-476B-8E0E-53730D456657}" dt="2026-05-24T23:38:40.061" v="91" actId="20577"/>
+          <ac:spMkLst>
+            <pc:docMk/>
+            <pc:sldMk cId="0" sldId="281"/>
+            <ac:spMk id="14" creationId="{00000000-0000-0000-0000-000000000000}"/>
+          </ac:spMkLst>
+        </pc:spChg>
+      </pc:sldChg>
+      <pc:sldChg chg="modSp mod">
+        <pc:chgData name="Massimo Petrolati" userId="e7daa978-26e3-4c4e-8847-ea9e36559ae5" providerId="ADAL" clId="{A7182F9C-EEA7-476B-8E0E-53730D456657}" dt="2026-05-24T23:37:37.767" v="77" actId="20577"/>
+        <pc:sldMkLst>
+          <pc:docMk/>
+          <pc:sldMk cId="0" sldId="282"/>
+        </pc:sldMkLst>
+        <pc:spChg chg="mod">
+          <ac:chgData name="Massimo Petrolati" userId="e7daa978-26e3-4c4e-8847-ea9e36559ae5" providerId="ADAL" clId="{A7182F9C-EEA7-476B-8E0E-53730D456657}" dt="2026-05-24T23:37:37.767" v="77" actId="20577"/>
+          <ac:spMkLst>
+            <pc:docMk/>
+            <pc:sldMk cId="0" sldId="282"/>
+            <ac:spMk id="7" creationId="{00000000-0000-0000-0000-000000000000}"/>
+          </ac:spMkLst>
+        </pc:spChg>
+      </pc:sldChg>
+      <pc:sldChg chg="modSp mod">
+        <pc:chgData name="Massimo Petrolati" userId="e7daa978-26e3-4c4e-8847-ea9e36559ae5" providerId="ADAL" clId="{A7182F9C-EEA7-476B-8E0E-53730D456657}" dt="2026-05-24T23:38:28.555" v="79" actId="20577"/>
+        <pc:sldMkLst>
+          <pc:docMk/>
+          <pc:sldMk cId="0" sldId="283"/>
+        </pc:sldMkLst>
+        <pc:spChg chg="mod">
+          <ac:chgData name="Massimo Petrolati" userId="e7daa978-26e3-4c4e-8847-ea9e36559ae5" providerId="ADAL" clId="{A7182F9C-EEA7-476B-8E0E-53730D456657}" dt="2026-05-24T23:38:28.555" v="79" actId="20577"/>
+          <ac:spMkLst>
+            <pc:docMk/>
+            <pc:sldMk cId="0" sldId="283"/>
+            <ac:spMk id="12" creationId="{00000000-0000-0000-0000-000000000000}"/>
+          </ac:spMkLst>
+        </pc:spChg>
+      </pc:sldChg>
       <pc:sldChg chg="modSp add mod ord modTransition">
         <pc:chgData name="Massimo Petrolati" userId="e7daa978-26e3-4c4e-8847-ea9e36559ae5" providerId="ADAL" clId="{A7182F9C-EEA7-476B-8E0E-53730D456657}" dt="2026-05-16T13:11:10.498" v="53" actId="404"/>
         <pc:sldMkLst>
@@ -367,7 +419,7 @@
           <a:p>
             <a:fld id="{5BCAD085-E8A6-8845-BD4E-CB4CCA059FC4}" type="datetimeFigureOut">
               <a:rPr lang="en-US" smtClean="0"/>
-              <a:t>5/16/2026</a:t>
+              <a:t>5/25/2026</a:t>
             </a:fld>
             <a:endParaRPr lang="en-US"/>
           </a:p>
@@ -535,7 +587,7 @@
           <a:p>
             <a:fld id="{5BCAD085-E8A6-8845-BD4E-CB4CCA059FC4}" type="datetimeFigureOut">
               <a:rPr lang="en-US" smtClean="0"/>
-              <a:t>5/16/2026</a:t>
+              <a:t>5/25/2026</a:t>
             </a:fld>
             <a:endParaRPr lang="en-US"/>
           </a:p>
@@ -713,7 +765,7 @@
           <a:p>
             <a:fld id="{5BCAD085-E8A6-8845-BD4E-CB4CCA059FC4}" type="datetimeFigureOut">
               <a:rPr lang="en-US" smtClean="0"/>
-              <a:t>5/16/2026</a:t>
+              <a:t>5/25/2026</a:t>
             </a:fld>
             <a:endParaRPr lang="en-US"/>
           </a:p>
@@ -881,7 +933,7 @@
           <a:p>
             <a:fld id="{5BCAD085-E8A6-8845-BD4E-CB4CCA059FC4}" type="datetimeFigureOut">
               <a:rPr lang="en-US" smtClean="0"/>
-              <a:t>5/16/2026</a:t>
+              <a:t>5/25/2026</a:t>
             </a:fld>
             <a:endParaRPr lang="en-US"/>
           </a:p>
@@ -1126,7 +1178,7 @@
           <a:p>
             <a:fld id="{5BCAD085-E8A6-8845-BD4E-CB4CCA059FC4}" type="datetimeFigureOut">
               <a:rPr lang="en-US" smtClean="0"/>
-              <a:t>5/16/2026</a:t>
+              <a:t>5/25/2026</a:t>
             </a:fld>
             <a:endParaRPr lang="en-US"/>
           </a:p>
@@ -1411,7 +1463,7 @@
           <a:p>
             <a:fld id="{5BCAD085-E8A6-8845-BD4E-CB4CCA059FC4}" type="datetimeFigureOut">
               <a:rPr lang="en-US" smtClean="0"/>
-              <a:t>5/16/2026</a:t>
+              <a:t>5/25/2026</a:t>
             </a:fld>
             <a:endParaRPr lang="en-US"/>
           </a:p>
@@ -1830,7 +1882,7 @@
           <a:p>
             <a:fld id="{5BCAD085-E8A6-8845-BD4E-CB4CCA059FC4}" type="datetimeFigureOut">
               <a:rPr lang="en-US" smtClean="0"/>
-              <a:t>5/16/2026</a:t>
+              <a:t>5/25/2026</a:t>
             </a:fld>
             <a:endParaRPr lang="en-US"/>
           </a:p>
@@ -1947,7 +1999,7 @@
           <a:p>
             <a:fld id="{5BCAD085-E8A6-8845-BD4E-CB4CCA059FC4}" type="datetimeFigureOut">
               <a:rPr lang="en-US" smtClean="0"/>
-              <a:t>5/16/2026</a:t>
+              <a:t>5/25/2026</a:t>
             </a:fld>
             <a:endParaRPr lang="en-US"/>
           </a:p>
@@ -2042,7 +2094,7 @@
           <a:p>
             <a:fld id="{5BCAD085-E8A6-8845-BD4E-CB4CCA059FC4}" type="datetimeFigureOut">
               <a:rPr lang="en-US" smtClean="0"/>
-              <a:t>5/16/2026</a:t>
+              <a:t>5/25/2026</a:t>
             </a:fld>
             <a:endParaRPr lang="en-US"/>
           </a:p>
@@ -2317,7 +2369,7 @@
           <a:p>
             <a:fld id="{5BCAD085-E8A6-8845-BD4E-CB4CCA059FC4}" type="datetimeFigureOut">
               <a:rPr lang="en-US" smtClean="0"/>
-              <a:t>5/16/2026</a:t>
+              <a:t>5/25/2026</a:t>
             </a:fld>
             <a:endParaRPr lang="en-US"/>
           </a:p>
@@ -2569,7 +2621,7 @@
           <a:p>
             <a:fld id="{5BCAD085-E8A6-8845-BD4E-CB4CCA059FC4}" type="datetimeFigureOut">
               <a:rPr lang="en-US" smtClean="0"/>
-              <a:t>5/16/2026</a:t>
+              <a:t>5/25/2026</a:t>
             </a:fld>
             <a:endParaRPr lang="en-US"/>
           </a:p>
@@ -2780,7 +2832,7 @@
           <a:p>
             <a:fld id="{5BCAD085-E8A6-8845-BD4E-CB4CCA059FC4}" type="datetimeFigureOut">
               <a:rPr lang="en-US" smtClean="0"/>
-              <a:t>5/16/2026</a:t>
+              <a:t>5/25/2026</a:t>
             </a:fld>
             <a:endParaRPr lang="en-US"/>
           </a:p>
@@ -3805,19 +3857,55 @@
           <a:p>
             <a:pPr algn="l"/>
             <a:r>
-              <a:rPr sz="1300" i="1">
+              <a:rPr sz="1300" i="1" dirty="0">
                 <a:solidFill>
                   <a:srgbClr val="8893A0"/>
                 </a:solidFill>
                 <a:latin typeface="Consolas"/>
               </a:rPr>
-              <a:t>// src/middlewares/errorHandler.js</a:t>
-            </a:r>
-          </a:p>
-          <a:p>
-            <a:pPr algn="l"/>
-            <a:r>
-              <a:rPr sz="1300" b="1">
+              <a:t>// </a:t>
+            </a:r>
+            <a:r>
+              <a:rPr sz="1300" i="1" dirty="0" err="1">
+                <a:solidFill>
+                  <a:srgbClr val="8893A0"/>
+                </a:solidFill>
+                <a:latin typeface="Consolas"/>
+              </a:rPr>
+              <a:t>src</a:t>
+            </a:r>
+            <a:r>
+              <a:rPr sz="1300" i="1" dirty="0">
+                <a:solidFill>
+                  <a:srgbClr val="8893A0"/>
+                </a:solidFill>
+                <a:latin typeface="Consolas"/>
+              </a:rPr>
+              <a:t>/</a:t>
+            </a:r>
+            <a:r>
+              <a:rPr sz="1300" i="1" dirty="0" err="1">
+                <a:solidFill>
+                  <a:srgbClr val="8893A0"/>
+                </a:solidFill>
+                <a:latin typeface="Consolas"/>
+              </a:rPr>
+              <a:t>middlewares</a:t>
+            </a:r>
+            <a:r>
+              <a:rPr sz="1300" i="1" dirty="0">
+                <a:solidFill>
+                  <a:srgbClr val="8893A0"/>
+                </a:solidFill>
+                <a:latin typeface="Consolas"/>
+              </a:rPr>
+              <a:t>/errorHandler.js</a:t>
+            </a:r>
+          </a:p>
+          <a:p>
+            <a:pPr algn="l"/>
+            <a:r>
+              <a:rPr sz="1300" b="1" dirty="0">
                 <a:solidFill>
                   <a:srgbClr val="5DD8C3"/>
                 </a:solidFill>
@@ -3826,7 +3914,7 @@
               <a:t>export</a:t>
             </a:r>
             <a:r>
-              <a:rPr sz="1300">
+              <a:rPr sz="1300" dirty="0">
                 <a:solidFill>
                   <a:srgbClr val="E8EEF1"/>
                 </a:solidFill>
@@ -3835,7 +3923,7 @@
               <a:t> </a:t>
             </a:r>
             <a:r>
-              <a:rPr sz="1300" b="1">
+              <a:rPr sz="1300" b="1" dirty="0">
                 <a:solidFill>
                   <a:srgbClr val="5DD8C3"/>
                 </a:solidFill>
@@ -3844,31 +3932,37 @@
               <a:t>function</a:t>
             </a:r>
             <a:r>
-              <a:rPr sz="1300">
-                <a:solidFill>
-                  <a:srgbClr val="E8EEF1"/>
-                </a:solidFill>
-                <a:latin typeface="Consolas"/>
-              </a:rPr>
-              <a:t> errorHandler(err, req, res, next) {</a:t>
-            </a:r>
-          </a:p>
-          <a:p>
-            <a:pPr algn="l"/>
-            <a:r>
-              <a:rPr sz="1300">
-                <a:solidFill>
-                  <a:srgbClr val="E8EEF1"/>
-                </a:solidFill>
-                <a:latin typeface="Consolas"/>
-              </a:rPr>
-              <a:t>  console.error(err);</a:t>
-            </a:r>
-          </a:p>
-          <a:p>
-            <a:pPr algn="l"/>
-            <a:r>
-              <a:rPr sz="1300">
+              <a:rPr sz="1300" dirty="0">
+                <a:solidFill>
+                  <a:srgbClr val="E8EEF1"/>
+                </a:solidFill>
+                <a:latin typeface="Consolas"/>
+              </a:rPr>
+              <a:t> </a:t>
+            </a:r>
+            <a:r>
+              <a:rPr sz="1300" dirty="0" err="1">
+                <a:solidFill>
+                  <a:srgbClr val="E8EEF1"/>
+                </a:solidFill>
+                <a:latin typeface="Consolas"/>
+              </a:rPr>
+              <a:t>errorHandler</a:t>
+            </a:r>
+            <a:r>
+              <a:rPr sz="1300" dirty="0">
+                <a:solidFill>
+                  <a:srgbClr val="E8EEF1"/>
+                </a:solidFill>
+                <a:latin typeface="Consolas"/>
+              </a:rPr>
+              <a:t>(err, req, res, next) {</a:t>
+            </a:r>
+          </a:p>
+          <a:p>
+            <a:pPr algn="l"/>
+            <a:r>
+              <a:rPr sz="1300" dirty="0">
                 <a:solidFill>
                   <a:srgbClr val="E8EEF1"/>
                 </a:solidFill>
@@ -3877,7 +3971,37 @@
               <a:t>  </a:t>
             </a:r>
             <a:r>
-              <a:rPr sz="1300" b="1">
+              <a:rPr sz="1300" dirty="0" err="1">
+                <a:solidFill>
+                  <a:srgbClr val="E8EEF1"/>
+                </a:solidFill>
+                <a:latin typeface="Consolas"/>
+              </a:rPr>
+              <a:t>console.error</a:t>
+            </a:r>
+            <a:r>
+              <a:rPr sz="1300" dirty="0">
+                <a:solidFill>
+                  <a:srgbClr val="E8EEF1"/>
+                </a:solidFill>
+                <a:latin typeface="Consolas"/>
+              </a:rPr>
+              <a:t>(err);</a:t>
+            </a:r>
+          </a:p>
+          <a:p>
+            <a:pPr algn="l"/>
+            <a:r>
+              <a:rPr sz="1300" dirty="0">
+                <a:solidFill>
+                  <a:srgbClr val="E8EEF1"/>
+                </a:solidFill>
+                <a:latin typeface="Consolas"/>
+              </a:rPr>
+              <a:t>  </a:t>
+            </a:r>
+            <a:r>
+              <a:rPr sz="1300" b="1" dirty="0">
                 <a:solidFill>
                   <a:srgbClr val="5DD8C3"/>
                 </a:solidFill>
@@ -3886,19 +4010,37 @@
               <a:t>const</a:t>
             </a:r>
             <a:r>
-              <a:rPr sz="1300">
-                <a:solidFill>
-                  <a:srgbClr val="E8EEF1"/>
-                </a:solidFill>
-                <a:latin typeface="Consolas"/>
-              </a:rPr>
-              <a:t> status = err.statusCode || 500;</a:t>
-            </a:r>
-          </a:p>
-          <a:p>
-            <a:pPr algn="l"/>
-            <a:r>
-              <a:rPr sz="1300">
+              <a:rPr sz="1300" dirty="0">
+                <a:solidFill>
+                  <a:srgbClr val="E8EEF1"/>
+                </a:solidFill>
+                <a:latin typeface="Consolas"/>
+              </a:rPr>
+              <a:t> status = </a:t>
+            </a:r>
+            <a:r>
+              <a:rPr sz="1300" dirty="0" err="1">
+                <a:solidFill>
+                  <a:srgbClr val="E8EEF1"/>
+                </a:solidFill>
+                <a:latin typeface="Consolas"/>
+              </a:rPr>
+              <a:t>err.statusCode</a:t>
+            </a:r>
+            <a:r>
+              <a:rPr sz="1300" dirty="0">
+                <a:solidFill>
+                  <a:srgbClr val="E8EEF1"/>
+                </a:solidFill>
+                <a:latin typeface="Consolas"/>
+              </a:rPr>
+              <a:t> || 500;</a:t>
+            </a:r>
+          </a:p>
+          <a:p>
+            <a:pPr algn="l"/>
+            <a:r>
+              <a:rPr sz="1300" dirty="0">
                 <a:solidFill>
                   <a:srgbClr val="E8EEF1"/>
                 </a:solidFill>
@@ -3907,7 +4049,7 @@
               <a:t>  </a:t>
             </a:r>
             <a:r>
-              <a:rPr sz="1300" b="1">
+              <a:rPr sz="1300" b="1" dirty="0">
                 <a:solidFill>
                   <a:srgbClr val="5DD8C3"/>
                 </a:solidFill>
@@ -3916,25 +4058,79 @@
               <a:t>const</a:t>
             </a:r>
             <a:r>
-              <a:rPr sz="1300">
-                <a:solidFill>
-                  <a:srgbClr val="E8EEF1"/>
-                </a:solidFill>
-                <a:latin typeface="Consolas"/>
-              </a:rPr>
-              <a:t> message = err.message || </a:t>
-            </a:r>
-            <a:r>
-              <a:rPr sz="1300">
+              <a:rPr sz="1300" dirty="0">
+                <a:solidFill>
+                  <a:srgbClr val="E8EEF1"/>
+                </a:solidFill>
+                <a:latin typeface="Consolas"/>
+              </a:rPr>
+              <a:t> message = </a:t>
+            </a:r>
+            <a:r>
+              <a:rPr sz="1300" dirty="0" err="1">
+                <a:solidFill>
+                  <a:srgbClr val="E8EEF1"/>
+                </a:solidFill>
+                <a:latin typeface="Consolas"/>
+              </a:rPr>
+              <a:t>err.message</a:t>
+            </a:r>
+            <a:r>
+              <a:rPr sz="1300" dirty="0">
+                <a:solidFill>
+                  <a:srgbClr val="E8EEF1"/>
+                </a:solidFill>
+                <a:latin typeface="Consolas"/>
+              </a:rPr>
+              <a:t> || </a:t>
+            </a:r>
+            <a:r>
+              <a:rPr sz="1300" dirty="0">
                 <a:solidFill>
                   <a:srgbClr val="FFD27F"/>
                 </a:solidFill>
                 <a:latin typeface="Consolas"/>
               </a:rPr>
-              <a:t>'Errore interno'</a:t>
-            </a:r>
-            <a:r>
-              <a:rPr sz="1300">
+              <a:t>'</a:t>
+            </a:r>
+            <a:r>
+              <a:rPr sz="1300" dirty="0" err="1">
+                <a:solidFill>
+                  <a:srgbClr val="FFD27F"/>
+                </a:solidFill>
+                <a:latin typeface="Consolas"/>
+              </a:rPr>
+              <a:t>Errore</a:t>
+            </a:r>
+            <a:r>
+              <a:rPr sz="1300" dirty="0">
+                <a:solidFill>
+                  <a:srgbClr val="FFD27F"/>
+                </a:solidFill>
+                <a:latin typeface="Consolas"/>
+              </a:rPr>
+              <a:t> </a:t>
+            </a:r>
+            <a:r>
+              <a:rPr sz="1300" dirty="0" err="1">
+                <a:solidFill>
+                  <a:srgbClr val="FFD27F"/>
+                </a:solidFill>
+                <a:latin typeface="Consolas"/>
+              </a:rPr>
+              <a:t>interno</a:t>
+            </a:r>
+            <a:r>
+              <a:rPr sz="1300" dirty="0">
+                <a:solidFill>
+                  <a:srgbClr val="FFD27F"/>
+                </a:solidFill>
+                <a:latin typeface="Consolas"/>
+              </a:rPr>
+              <a:t>'</a:t>
+            </a:r>
+            <a:r>
+              <a:rPr sz="1300" dirty="0">
                 <a:solidFill>
                   <a:srgbClr val="E8EEF1"/>
                 </a:solidFill>
@@ -3946,19 +4142,73 @@
           <a:p>
             <a:pPr algn="l"/>
             <a:r>
-              <a:rPr sz="1300">
-                <a:solidFill>
-                  <a:srgbClr val="E8EEF1"/>
-                </a:solidFill>
-                <a:latin typeface="Consolas"/>
-              </a:rPr>
-              <a:t>  res.status(status).json({ errore: message });</a:t>
-            </a:r>
-          </a:p>
-          <a:p>
-            <a:pPr algn="l"/>
-            <a:r>
-              <a:rPr sz="1300">
+              <a:rPr sz="1300" dirty="0">
+                <a:solidFill>
+                  <a:srgbClr val="E8EEF1"/>
+                </a:solidFill>
+                <a:latin typeface="Consolas"/>
+              </a:rPr>
+              <a:t>  </a:t>
+            </a:r>
+            <a:r>
+              <a:rPr sz="1300" dirty="0" err="1">
+                <a:solidFill>
+                  <a:srgbClr val="E8EEF1"/>
+                </a:solidFill>
+                <a:latin typeface="Consolas"/>
+              </a:rPr>
+              <a:t>res.status</a:t>
+            </a:r>
+            <a:r>
+              <a:rPr sz="1300" dirty="0">
+                <a:solidFill>
+                  <a:srgbClr val="E8EEF1"/>
+                </a:solidFill>
+                <a:latin typeface="Consolas"/>
+              </a:rPr>
+              <a:t>(status).</a:t>
+            </a:r>
+            <a:r>
+              <a:rPr sz="1300" dirty="0" err="1">
+                <a:solidFill>
+                  <a:srgbClr val="E8EEF1"/>
+                </a:solidFill>
+                <a:latin typeface="Consolas"/>
+              </a:rPr>
+              <a:t>json</a:t>
+            </a:r>
+            <a:r>
+              <a:rPr sz="1300" dirty="0">
+                <a:solidFill>
+                  <a:srgbClr val="E8EEF1"/>
+                </a:solidFill>
+                <a:latin typeface="Consolas"/>
+              </a:rPr>
+              <a:t>({ </a:t>
+            </a:r>
+            <a:r>
+              <a:rPr sz="1300" dirty="0" err="1">
+                <a:solidFill>
+                  <a:srgbClr val="E8EEF1"/>
+                </a:solidFill>
+                <a:latin typeface="Consolas"/>
+              </a:rPr>
+              <a:t>errore</a:t>
+            </a:r>
+            <a:r>
+              <a:rPr sz="1300" dirty="0">
+                <a:solidFill>
+                  <a:srgbClr val="E8EEF1"/>
+                </a:solidFill>
+                <a:latin typeface="Consolas"/>
+              </a:rPr>
+              <a:t>: message });</a:t>
+            </a:r>
+          </a:p>
+          <a:p>
+            <a:pPr algn="l"/>
+            <a:r>
+              <a:rPr sz="1300" dirty="0">
                 <a:solidFill>
                   <a:srgbClr val="E8EEF1"/>
                 </a:solidFill>
@@ -4586,7 +4836,7 @@
           <a:p>
             <a:pPr algn="l"/>
             <a:r>
-              <a:rPr sz="1300" b="1">
+              <a:rPr sz="1300" b="1" dirty="0">
                 <a:solidFill>
                   <a:srgbClr val="5DD8C3"/>
                 </a:solidFill>
@@ -4595,7 +4845,7 @@
               <a:t>export</a:t>
             </a:r>
             <a:r>
-              <a:rPr sz="1300">
+              <a:rPr sz="1300" dirty="0">
                 <a:solidFill>
                   <a:srgbClr val="E8EEF1"/>
                 </a:solidFill>
@@ -4604,7 +4854,7 @@
               <a:t> </a:t>
             </a:r>
             <a:r>
-              <a:rPr sz="1300" b="1">
+              <a:rPr sz="1300" b="1" dirty="0">
                 <a:solidFill>
                   <a:srgbClr val="5DD8C3"/>
                 </a:solidFill>
@@ -4613,16 +4863,34 @@
               <a:t>class</a:t>
             </a:r>
             <a:r>
-              <a:rPr sz="1300">
-                <a:solidFill>
-                  <a:srgbClr val="E8EEF1"/>
-                </a:solidFill>
-                <a:latin typeface="Consolas"/>
-              </a:rPr>
-              <a:t> AppError </a:t>
-            </a:r>
-            <a:r>
-              <a:rPr sz="1300" b="1">
+              <a:rPr sz="1300" dirty="0">
+                <a:solidFill>
+                  <a:srgbClr val="E8EEF1"/>
+                </a:solidFill>
+                <a:latin typeface="Consolas"/>
+              </a:rPr>
+              <a:t> </a:t>
+            </a:r>
+            <a:r>
+              <a:rPr sz="1300" dirty="0" err="1">
+                <a:solidFill>
+                  <a:srgbClr val="E8EEF1"/>
+                </a:solidFill>
+                <a:latin typeface="Consolas"/>
+              </a:rPr>
+              <a:t>AppError</a:t>
+            </a:r>
+            <a:r>
+              <a:rPr sz="1300" dirty="0">
+                <a:solidFill>
+                  <a:srgbClr val="E8EEF1"/>
+                </a:solidFill>
+                <a:latin typeface="Consolas"/>
+              </a:rPr>
+              <a:t> </a:t>
+            </a:r>
+            <a:r>
+              <a:rPr sz="1300" b="1" dirty="0">
                 <a:solidFill>
                   <a:srgbClr val="5DD8C3"/>
                 </a:solidFill>
@@ -4631,7 +4899,7 @@
               <a:t>extends</a:t>
             </a:r>
             <a:r>
-              <a:rPr sz="1300">
+              <a:rPr sz="1300" dirty="0">
                 <a:solidFill>
                   <a:srgbClr val="E8EEF1"/>
                 </a:solidFill>
@@ -4643,19 +4911,37 @@
           <a:p>
             <a:pPr algn="l"/>
             <a:r>
-              <a:rPr sz="1300">
-                <a:solidFill>
-                  <a:srgbClr val="E8EEF1"/>
-                </a:solidFill>
-                <a:latin typeface="Consolas"/>
-              </a:rPr>
-              <a:t>  constructor(message, statusCode = 500) {</a:t>
-            </a:r>
-          </a:p>
-          <a:p>
-            <a:pPr algn="l"/>
-            <a:r>
-              <a:rPr sz="1300">
+              <a:rPr sz="1300" dirty="0">
+                <a:solidFill>
+                  <a:srgbClr val="E8EEF1"/>
+                </a:solidFill>
+                <a:latin typeface="Consolas"/>
+              </a:rPr>
+              <a:t>  constructor(message, </a:t>
+            </a:r>
+            <a:r>
+              <a:rPr sz="1300" dirty="0" err="1">
+                <a:solidFill>
+                  <a:srgbClr val="E8EEF1"/>
+                </a:solidFill>
+                <a:latin typeface="Consolas"/>
+              </a:rPr>
+              <a:t>statusCode</a:t>
+            </a:r>
+            <a:r>
+              <a:rPr sz="1300" dirty="0">
+                <a:solidFill>
+                  <a:srgbClr val="E8EEF1"/>
+                </a:solidFill>
+                <a:latin typeface="Consolas"/>
+              </a:rPr>
+              <a:t> = 500) {</a:t>
+            </a:r>
+          </a:p>
+          <a:p>
+            <a:pPr algn="l"/>
+            <a:r>
+              <a:rPr sz="1300" dirty="0">
                 <a:solidFill>
                   <a:srgbClr val="E8EEF1"/>
                 </a:solidFill>
@@ -4664,7 +4950,7 @@
               <a:t>    </a:t>
             </a:r>
             <a:r>
-              <a:rPr sz="1300" b="1">
+              <a:rPr sz="1300" b="1" dirty="0">
                 <a:solidFill>
                   <a:srgbClr val="5DD8C3"/>
                 </a:solidFill>
@@ -4673,7 +4959,7 @@
               <a:t>super</a:t>
             </a:r>
             <a:r>
-              <a:rPr sz="1300">
+              <a:rPr sz="1300" dirty="0">
                 <a:solidFill>
                   <a:srgbClr val="E8EEF1"/>
                 </a:solidFill>
@@ -4685,7 +4971,7 @@
           <a:p>
             <a:pPr algn="l"/>
             <a:r>
-              <a:rPr sz="1300">
+              <a:rPr sz="1300" dirty="0">
                 <a:solidFill>
                   <a:srgbClr val="E8EEF1"/>
                 </a:solidFill>
@@ -4694,7 +4980,7 @@
               <a:t>    </a:t>
             </a:r>
             <a:r>
-              <a:rPr sz="1300" b="1">
+              <a:rPr sz="1300" b="1" dirty="0" err="1">
                 <a:solidFill>
                   <a:srgbClr val="5DD8C3"/>
                 </a:solidFill>
@@ -4703,19 +4989,46 @@
               <a:t>this</a:t>
             </a:r>
             <a:r>
-              <a:rPr sz="1300">
-                <a:solidFill>
-                  <a:srgbClr val="E8EEF1"/>
-                </a:solidFill>
-                <a:latin typeface="Consolas"/>
-              </a:rPr>
-              <a:t>.statusCode = statusCode;</a:t>
-            </a:r>
-          </a:p>
-          <a:p>
-            <a:pPr algn="l"/>
-            <a:r>
-              <a:rPr sz="1300">
+              <a:rPr sz="1300" dirty="0" err="1">
+                <a:solidFill>
+                  <a:srgbClr val="E8EEF1"/>
+                </a:solidFill>
+                <a:latin typeface="Consolas"/>
+              </a:rPr>
+              <a:t>.statusCode</a:t>
+            </a:r>
+            <a:r>
+              <a:rPr sz="1300" dirty="0">
+                <a:solidFill>
+                  <a:srgbClr val="E8EEF1"/>
+                </a:solidFill>
+                <a:latin typeface="Consolas"/>
+              </a:rPr>
+              <a:t> = </a:t>
+            </a:r>
+            <a:r>
+              <a:rPr sz="1300" dirty="0" err="1">
+                <a:solidFill>
+                  <a:srgbClr val="E8EEF1"/>
+                </a:solidFill>
+                <a:latin typeface="Consolas"/>
+              </a:rPr>
+              <a:t>statusCode</a:t>
+            </a:r>
+            <a:r>
+              <a:rPr sz="1300" dirty="0">
+                <a:solidFill>
+                  <a:srgbClr val="E8EEF1"/>
+                </a:solidFill>
+                <a:latin typeface="Consolas"/>
+              </a:rPr>
+              <a:t>;</a:t>
+            </a:r>
+          </a:p>
+          <a:p>
+            <a:pPr algn="l"/>
+            <a:r>
+              <a:rPr sz="1300" dirty="0">
                 <a:solidFill>
                   <a:srgbClr val="E8EEF1"/>
                 </a:solidFill>
@@ -4724,7 +5037,7 @@
               <a:t>    </a:t>
             </a:r>
             <a:r>
-              <a:rPr sz="1300" b="1">
+              <a:rPr sz="1300" b="1" dirty="0">
                 <a:solidFill>
                   <a:srgbClr val="5DD8C3"/>
                 </a:solidFill>
@@ -4733,7 +5046,7 @@
               <a:t>this</a:t>
             </a:r>
             <a:r>
-              <a:rPr sz="1300">
+              <a:rPr sz="1300" dirty="0">
                 <a:solidFill>
                   <a:srgbClr val="E8EEF1"/>
                 </a:solidFill>
@@ -4742,16 +5055,34 @@
               <a:t>.name = </a:t>
             </a:r>
             <a:r>
-              <a:rPr sz="1300">
+              <a:rPr sz="1300" dirty="0">
                 <a:solidFill>
                   <a:srgbClr val="FFD27F"/>
                 </a:solidFill>
                 <a:latin typeface="Consolas"/>
               </a:rPr>
-              <a:t>'AppError'</a:t>
-            </a:r>
-            <a:r>
-              <a:rPr sz="1300">
+              <a:t>'</a:t>
+            </a:r>
+            <a:r>
+              <a:rPr sz="1300" dirty="0" err="1">
+                <a:solidFill>
+                  <a:srgbClr val="FFD27F"/>
+                </a:solidFill>
+                <a:latin typeface="Consolas"/>
+              </a:rPr>
+              <a:t>AppError</a:t>
+            </a:r>
+            <a:r>
+              <a:rPr sz="1300" dirty="0">
+                <a:solidFill>
+                  <a:srgbClr val="FFD27F"/>
+                </a:solidFill>
+                <a:latin typeface="Consolas"/>
+              </a:rPr>
+              <a:t>'</a:t>
+            </a:r>
+            <a:r>
+              <a:rPr sz="1300" dirty="0">
                 <a:solidFill>
                   <a:srgbClr val="E8EEF1"/>
                 </a:solidFill>
@@ -4763,7 +5094,7 @@
           <a:p>
             <a:pPr algn="l"/>
             <a:r>
-              <a:rPr sz="1300">
+              <a:rPr sz="1300" dirty="0">
                 <a:solidFill>
                   <a:srgbClr val="E8EEF1"/>
                 </a:solidFill>
@@ -4775,7 +5106,7 @@
           <a:p>
             <a:pPr algn="l"/>
             <a:r>
-              <a:rPr sz="1300">
+              <a:rPr sz="1300" dirty="0">
                 <a:solidFill>
                   <a:srgbClr val="E8EEF1"/>
                 </a:solidFill>
@@ -5084,16 +5415,25 @@
           <a:p>
             <a:pPr algn="l"/>
             <a:r>
-              <a:rPr sz="1300">
-                <a:solidFill>
-                  <a:srgbClr val="E8EEF1"/>
-                </a:solidFill>
-                <a:latin typeface="Consolas"/>
-              </a:rPr>
-              <a:t>router.get(</a:t>
-            </a:r>
-            <a:r>
-              <a:rPr sz="1300">
+              <a:rPr sz="1300" dirty="0" err="1">
+                <a:solidFill>
+                  <a:srgbClr val="E8EEF1"/>
+                </a:solidFill>
+                <a:latin typeface="Consolas"/>
+              </a:rPr>
+              <a:t>router.get</a:t>
+            </a:r>
+            <a:r>
+              <a:rPr sz="1300" dirty="0">
+                <a:solidFill>
+                  <a:srgbClr val="E8EEF1"/>
+                </a:solidFill>
+                <a:latin typeface="Consolas"/>
+              </a:rPr>
+              <a:t>(</a:t>
+            </a:r>
+            <a:r>
+              <a:rPr sz="1300" dirty="0">
                 <a:solidFill>
                   <a:srgbClr val="FFD27F"/>
                 </a:solidFill>
@@ -5102,16 +5442,34 @@
               <a:t>'/:id'</a:t>
             </a:r>
             <a:r>
-              <a:rPr sz="1300">
-                <a:solidFill>
-                  <a:srgbClr val="E8EEF1"/>
-                </a:solidFill>
-                <a:latin typeface="Consolas"/>
-              </a:rPr>
-              <a:t>, asyncHandler(</a:t>
-            </a:r>
-            <a:r>
-              <a:rPr sz="1300" b="1">
+              <a:rPr sz="1300" dirty="0">
+                <a:solidFill>
+                  <a:srgbClr val="E8EEF1"/>
+                </a:solidFill>
+                <a:latin typeface="Consolas"/>
+              </a:rPr>
+              <a:t>, </a:t>
+            </a:r>
+            <a:r>
+              <a:rPr sz="1300" dirty="0" err="1">
+                <a:solidFill>
+                  <a:srgbClr val="E8EEF1"/>
+                </a:solidFill>
+                <a:latin typeface="Consolas"/>
+              </a:rPr>
+              <a:t>asyncHandler</a:t>
+            </a:r>
+            <a:r>
+              <a:rPr sz="1300" dirty="0">
+                <a:solidFill>
+                  <a:srgbClr val="E8EEF1"/>
+                </a:solidFill>
+                <a:latin typeface="Consolas"/>
+              </a:rPr>
+              <a:t>(</a:t>
+            </a:r>
+            <a:r>
+              <a:rPr sz="1300" b="1" dirty="0">
                 <a:solidFill>
                   <a:srgbClr val="5DD8C3"/>
                 </a:solidFill>
@@ -5120,7 +5478,7 @@
               <a:t>async</a:t>
             </a:r>
             <a:r>
-              <a:rPr sz="1300">
+              <a:rPr sz="1300" dirty="0">
                 <a:solidFill>
                   <a:srgbClr val="E8EEF1"/>
                 </a:solidFill>
@@ -5132,7 +5490,7 @@
           <a:p>
             <a:pPr algn="l"/>
             <a:r>
-              <a:rPr sz="1300">
+              <a:rPr sz="1300" dirty="0">
                 <a:solidFill>
                   <a:srgbClr val="E8EEF1"/>
                 </a:solidFill>
@@ -5141,7 +5499,7 @@
               <a:t>  </a:t>
             </a:r>
             <a:r>
-              <a:rPr sz="1300" b="1">
+              <a:rPr sz="1300" b="1" dirty="0">
                 <a:solidFill>
                   <a:srgbClr val="5DD8C3"/>
                 </a:solidFill>
@@ -5150,7 +5508,7 @@
               <a:t>const</a:t>
             </a:r>
             <a:r>
-              <a:rPr sz="1300">
+              <a:rPr sz="1300" dirty="0">
                 <a:solidFill>
                   <a:srgbClr val="E8EEF1"/>
                 </a:solidFill>
@@ -5159,7 +5517,7 @@
               <a:t> user = </a:t>
             </a:r>
             <a:r>
-              <a:rPr sz="1300" b="1">
+              <a:rPr sz="1300" b="1" dirty="0">
                 <a:solidFill>
                   <a:srgbClr val="5DD8C3"/>
                 </a:solidFill>
@@ -5168,19 +5526,37 @@
               <a:t>await</a:t>
             </a:r>
             <a:r>
-              <a:rPr sz="1300">
-                <a:solidFill>
-                  <a:srgbClr val="E8EEF1"/>
-                </a:solidFill>
-                <a:latin typeface="Consolas"/>
-              </a:rPr>
-              <a:t> userRepository.findById(req.params.id);</a:t>
-            </a:r>
-          </a:p>
-          <a:p>
-            <a:pPr algn="l"/>
-            <a:r>
-              <a:rPr sz="1300">
+              <a:rPr sz="1300" dirty="0">
+                <a:solidFill>
+                  <a:srgbClr val="E8EEF1"/>
+                </a:solidFill>
+                <a:latin typeface="Consolas"/>
+              </a:rPr>
+              <a:t> </a:t>
+            </a:r>
+            <a:r>
+              <a:rPr sz="1300" dirty="0" err="1">
+                <a:solidFill>
+                  <a:srgbClr val="E8EEF1"/>
+                </a:solidFill>
+                <a:latin typeface="Consolas"/>
+              </a:rPr>
+              <a:t>userRepository.findById</a:t>
+            </a:r>
+            <a:r>
+              <a:rPr sz="1300" dirty="0">
+                <a:solidFill>
+                  <a:srgbClr val="E8EEF1"/>
+                </a:solidFill>
+                <a:latin typeface="Consolas"/>
+              </a:rPr>
+              <a:t>(req.params.id);</a:t>
+            </a:r>
+          </a:p>
+          <a:p>
+            <a:pPr algn="l"/>
+            <a:r>
+              <a:rPr sz="1300" dirty="0">
                 <a:solidFill>
                   <a:srgbClr val="E8EEF1"/>
                 </a:solidFill>
@@ -5189,7 +5565,7 @@
               <a:t>  </a:t>
             </a:r>
             <a:r>
-              <a:rPr sz="1300" b="1">
+              <a:rPr sz="1300" b="1" dirty="0">
                 <a:solidFill>
                   <a:srgbClr val="5DD8C3"/>
                 </a:solidFill>
@@ -5198,7 +5574,7 @@
               <a:t>if</a:t>
             </a:r>
             <a:r>
-              <a:rPr sz="1300">
+              <a:rPr sz="1300" dirty="0">
                 <a:solidFill>
                   <a:srgbClr val="E8EEF1"/>
                 </a:solidFill>
@@ -5207,7 +5583,7 @@
               <a:t> (!user) </a:t>
             </a:r>
             <a:r>
-              <a:rPr sz="1300" b="1">
+              <a:rPr sz="1300" b="1" dirty="0">
                 <a:solidFill>
                   <a:srgbClr val="5DD8C3"/>
                 </a:solidFill>
@@ -5216,7 +5592,7 @@
               <a:t>throw</a:t>
             </a:r>
             <a:r>
-              <a:rPr sz="1300">
+              <a:rPr sz="1300" dirty="0">
                 <a:solidFill>
                   <a:srgbClr val="E8EEF1"/>
                 </a:solidFill>
@@ -5225,7 +5601,7 @@
               <a:t> </a:t>
             </a:r>
             <a:r>
-              <a:rPr sz="1300" b="1">
+              <a:rPr sz="1300" b="1" dirty="0">
                 <a:solidFill>
                   <a:srgbClr val="5DD8C3"/>
                 </a:solidFill>
@@ -5234,25 +5610,61 @@
               <a:t>new</a:t>
             </a:r>
             <a:r>
-              <a:rPr sz="1300">
-                <a:solidFill>
-                  <a:srgbClr val="E8EEF1"/>
-                </a:solidFill>
-                <a:latin typeface="Consolas"/>
-              </a:rPr>
-              <a:t> AppError(</a:t>
-            </a:r>
-            <a:r>
-              <a:rPr sz="1300">
+              <a:rPr sz="1300" dirty="0">
+                <a:solidFill>
+                  <a:srgbClr val="E8EEF1"/>
+                </a:solidFill>
+                <a:latin typeface="Consolas"/>
+              </a:rPr>
+              <a:t> </a:t>
+            </a:r>
+            <a:r>
+              <a:rPr sz="1300" dirty="0" err="1">
+                <a:solidFill>
+                  <a:srgbClr val="E8EEF1"/>
+                </a:solidFill>
+                <a:latin typeface="Consolas"/>
+              </a:rPr>
+              <a:t>AppError</a:t>
+            </a:r>
+            <a:r>
+              <a:rPr sz="1300" dirty="0">
+                <a:solidFill>
+                  <a:srgbClr val="E8EEF1"/>
+                </a:solidFill>
+                <a:latin typeface="Consolas"/>
+              </a:rPr>
+              <a:t>(</a:t>
+            </a:r>
+            <a:r>
+              <a:rPr sz="1300" dirty="0">
                 <a:solidFill>
                   <a:srgbClr val="FFD27F"/>
                 </a:solidFill>
                 <a:latin typeface="Consolas"/>
               </a:rPr>
-              <a:t>'Utente non trovato'</a:t>
-            </a:r>
-            <a:r>
-              <a:rPr sz="1300">
+              <a:t>'</a:t>
+            </a:r>
+            <a:r>
+              <a:rPr sz="1300" dirty="0" err="1">
+                <a:solidFill>
+                  <a:srgbClr val="FFD27F"/>
+                </a:solidFill>
+                <a:latin typeface="Consolas"/>
+              </a:rPr>
+              <a:t>Utente</a:t>
+            </a:r>
+            <a:r>
+              <a:rPr sz="1300" dirty="0">
+                <a:solidFill>
+                  <a:srgbClr val="FFD27F"/>
+                </a:solidFill>
+                <a:latin typeface="Consolas"/>
+              </a:rPr>
+              <a:t> non trovato'</a:t>
+            </a:r>
+            <a:r>
+              <a:rPr sz="1300" dirty="0">
                 <a:solidFill>
                   <a:srgbClr val="E8EEF1"/>
                 </a:solidFill>
@@ -5264,19 +5676,37 @@
           <a:p>
             <a:pPr algn="l"/>
             <a:r>
-              <a:rPr sz="1300">
-                <a:solidFill>
-                  <a:srgbClr val="E8EEF1"/>
-                </a:solidFill>
-                <a:latin typeface="Consolas"/>
-              </a:rPr>
-              <a:t>  res.json(user);</a:t>
-            </a:r>
-          </a:p>
-          <a:p>
-            <a:pPr algn="l"/>
-            <a:r>
-              <a:rPr sz="1300">
+              <a:rPr sz="1300" dirty="0">
+                <a:solidFill>
+                  <a:srgbClr val="E8EEF1"/>
+                </a:solidFill>
+                <a:latin typeface="Consolas"/>
+              </a:rPr>
+              <a:t>  </a:t>
+            </a:r>
+            <a:r>
+              <a:rPr sz="1300" dirty="0" err="1">
+                <a:solidFill>
+                  <a:srgbClr val="E8EEF1"/>
+                </a:solidFill>
+                <a:latin typeface="Consolas"/>
+              </a:rPr>
+              <a:t>res.json</a:t>
+            </a:r>
+            <a:r>
+              <a:rPr sz="1300" dirty="0">
+                <a:solidFill>
+                  <a:srgbClr val="E8EEF1"/>
+                </a:solidFill>
+                <a:latin typeface="Consolas"/>
+              </a:rPr>
+              <a:t>(user);</a:t>
+            </a:r>
+          </a:p>
+          <a:p>
+            <a:pPr algn="l"/>
+            <a:r>
+              <a:rPr sz="1300" dirty="0">
                 <a:solidFill>
                   <a:srgbClr val="E8EEF1"/>
                 </a:solidFill>
@@ -9776,28 +10206,100 @@
         <p:spPr>
           <a:xfrm>
             <a:off x="868680" y="5806440"/>
-            <a:ext cx="10515600" cy="457200"/>
-          </a:xfrm>
-          <a:prstGeom prst="rect">
-            <a:avLst/>
-          </a:prstGeom>
-          <a:noFill/>
-        </p:spPr>
-        <p:txBody>
-          <a:bodyPr wrap="square" lIns="0" tIns="0" rIns="0" bIns="0" anchor="t">
-            <a:spAutoFit/>
-          </a:bodyPr>
-          <a:lstStyle/>
-          <a:p>
-            <a:pPr algn="l"/>
-            <a:r>
-              <a:rPr sz="1300" b="0">
+            <a:ext cx="10515600" cy="200055"/>
+          </a:xfrm>
+          <a:prstGeom prst="rect">
+            <a:avLst/>
+          </a:prstGeom>
+          <a:noFill/>
+        </p:spPr>
+        <p:txBody>
+          <a:bodyPr wrap="square" lIns="0" tIns="0" rIns="0" bIns="0" anchor="t">
+            <a:spAutoFit/>
+          </a:bodyPr>
+          <a:lstStyle/>
+          <a:p>
+            <a:pPr algn="l"/>
+            <a:r>
+              <a:rPr sz="1300" b="0" dirty="0">
                 <a:solidFill>
                   <a:srgbClr val="555667"/>
                 </a:solidFill>
                 <a:latin typeface="Open Sans"/>
               </a:rPr>
-              <a:t>Ogni login farà WHERE email = ?. L'indice rende la lookup O(log n).</a:t>
+              <a:t>Ogni login </a:t>
+            </a:r>
+            <a:r>
+              <a:rPr sz="1300" b="0" dirty="0" err="1">
+                <a:solidFill>
+                  <a:srgbClr val="555667"/>
+                </a:solidFill>
+                <a:latin typeface="Open Sans"/>
+              </a:rPr>
+              <a:t>farà</a:t>
+            </a:r>
+            <a:r>
+              <a:rPr sz="1300" b="0" dirty="0">
+                <a:solidFill>
+                  <a:srgbClr val="555667"/>
+                </a:solidFill>
+                <a:latin typeface="Open Sans"/>
+              </a:rPr>
+              <a:t> WHERE email = ?. </a:t>
+            </a:r>
+            <a:r>
+              <a:rPr sz="1300" b="0" dirty="0" err="1">
+                <a:solidFill>
+                  <a:srgbClr val="555667"/>
+                </a:solidFill>
+                <a:latin typeface="Open Sans"/>
+              </a:rPr>
+              <a:t>L'indice</a:t>
+            </a:r>
+            <a:r>
+              <a:rPr sz="1300" b="0" dirty="0">
+                <a:solidFill>
+                  <a:srgbClr val="555667"/>
+                </a:solidFill>
+                <a:latin typeface="Open Sans"/>
+              </a:rPr>
+              <a:t> </a:t>
+            </a:r>
+            <a:r>
+              <a:rPr sz="1300" b="0" dirty="0" err="1">
+                <a:solidFill>
+                  <a:srgbClr val="555667"/>
+                </a:solidFill>
+                <a:latin typeface="Open Sans"/>
+              </a:rPr>
+              <a:t>rende</a:t>
+            </a:r>
+            <a:r>
+              <a:rPr sz="1300" b="0" dirty="0">
+                <a:solidFill>
+                  <a:srgbClr val="555667"/>
+                </a:solidFill>
+                <a:latin typeface="Open Sans"/>
+              </a:rPr>
+              <a:t> la lookup </a:t>
+            </a:r>
+            <a:r>
+              <a:rPr lang="it-IT" sz="1300" dirty="0">
+                <a:solidFill>
+                  <a:srgbClr val="555667"/>
+                </a:solidFill>
+                <a:latin typeface="Open Sans"/>
+              </a:rPr>
+              <a:t>ottimizzata</a:t>
+            </a:r>
+            <a:r>
+              <a:rPr sz="1300" b="0" dirty="0">
+                <a:solidFill>
+                  <a:srgbClr val="555667"/>
+                </a:solidFill>
+                <a:latin typeface="Open Sans"/>
+              </a:rPr>
+              <a:t>.</a:t>
             </a:r>
           </a:p>
         </p:txBody>
@@ -10201,7 +10703,7 @@
           <a:p>
             <a:pPr algn="l"/>
             <a:r>
-              <a:rPr sz="1300" b="1">
+              <a:rPr sz="1300" b="1" dirty="0">
                 <a:solidFill>
                   <a:srgbClr val="5DD8C3"/>
                 </a:solidFill>
@@ -10210,7 +10712,7 @@
               <a:t>import</a:t>
             </a:r>
             <a:r>
-              <a:rPr sz="1300">
+              <a:rPr sz="1300" dirty="0">
                 <a:solidFill>
                   <a:srgbClr val="E8EEF1"/>
                 </a:solidFill>
@@ -10219,7 +10721,7 @@
               <a:t> sqlite3 </a:t>
             </a:r>
             <a:r>
-              <a:rPr sz="1300" b="1">
+              <a:rPr sz="1300" b="1" dirty="0">
                 <a:solidFill>
                   <a:srgbClr val="5DD8C3"/>
                 </a:solidFill>
@@ -10228,7 +10730,7 @@
               <a:t>from</a:t>
             </a:r>
             <a:r>
-              <a:rPr sz="1300">
+              <a:rPr sz="1300" dirty="0">
                 <a:solidFill>
                   <a:srgbClr val="E8EEF1"/>
                 </a:solidFill>
@@ -10237,7 +10739,7 @@
               <a:t> </a:t>
             </a:r>
             <a:r>
-              <a:rPr sz="1300">
+              <a:rPr sz="1300" dirty="0">
                 <a:solidFill>
                   <a:srgbClr val="FFD27F"/>
                 </a:solidFill>
@@ -10246,7 +10748,7 @@
               <a:t>'sqlite3'</a:t>
             </a:r>
             <a:r>
-              <a:rPr sz="1300">
+              <a:rPr sz="1300" dirty="0">
                 <a:solidFill>
                   <a:srgbClr val="E8EEF1"/>
                 </a:solidFill>
@@ -10258,7 +10760,7 @@
           <a:p>
             <a:pPr algn="l"/>
             <a:r>
-              <a:rPr sz="1300" b="1">
+              <a:rPr sz="1300" b="1" dirty="0">
                 <a:solidFill>
                   <a:srgbClr val="5DD8C3"/>
                 </a:solidFill>
@@ -10267,7 +10769,7 @@
               <a:t>import</a:t>
             </a:r>
             <a:r>
-              <a:rPr sz="1300">
+              <a:rPr sz="1300" dirty="0">
                 <a:solidFill>
                   <a:srgbClr val="E8EEF1"/>
                 </a:solidFill>
@@ -10276,7 +10778,7 @@
               <a:t> { open } </a:t>
             </a:r>
             <a:r>
-              <a:rPr sz="1300" b="1">
+              <a:rPr sz="1300" b="1" dirty="0">
                 <a:solidFill>
                   <a:srgbClr val="5DD8C3"/>
                 </a:solidFill>
@@ -10285,7 +10787,7 @@
               <a:t>from</a:t>
             </a:r>
             <a:r>
-              <a:rPr sz="1300">
+              <a:rPr sz="1300" dirty="0">
                 <a:solidFill>
                   <a:srgbClr val="E8EEF1"/>
                 </a:solidFill>
@@ -10294,16 +10796,34 @@
               <a:t> </a:t>
             </a:r>
             <a:r>
-              <a:rPr sz="1300">
+              <a:rPr sz="1300" dirty="0">
                 <a:solidFill>
                   <a:srgbClr val="FFD27F"/>
                 </a:solidFill>
                 <a:latin typeface="Consolas"/>
               </a:rPr>
-              <a:t>'sqlite'</a:t>
-            </a:r>
-            <a:r>
-              <a:rPr sz="1300">
+              <a:t>'</a:t>
+            </a:r>
+            <a:r>
+              <a:rPr sz="1300" dirty="0" err="1">
+                <a:solidFill>
+                  <a:srgbClr val="FFD27F"/>
+                </a:solidFill>
+                <a:latin typeface="Consolas"/>
+              </a:rPr>
+              <a:t>sqlite</a:t>
+            </a:r>
+            <a:r>
+              <a:rPr sz="1300" dirty="0">
+                <a:solidFill>
+                  <a:srgbClr val="FFD27F"/>
+                </a:solidFill>
+                <a:latin typeface="Consolas"/>
+              </a:rPr>
+              <a:t>'</a:t>
+            </a:r>
+            <a:r>
+              <a:rPr sz="1300" dirty="0">
                 <a:solidFill>
                   <a:srgbClr val="E8EEF1"/>
                 </a:solidFill>
@@ -10315,7 +10835,7 @@
           <a:p>
             <a:pPr algn="l"/>
             <a:r>
-              <a:rPr sz="1300" b="1">
+              <a:rPr sz="1300" b="1" dirty="0">
                 <a:solidFill>
                   <a:srgbClr val="5DD8C3"/>
                 </a:solidFill>
@@ -10324,16 +10844,52 @@
               <a:t>import</a:t>
             </a:r>
             <a:r>
-              <a:rPr sz="1300">
-                <a:solidFill>
-                  <a:srgbClr val="E8EEF1"/>
-                </a:solidFill>
-                <a:latin typeface="Consolas"/>
-              </a:rPr>
-              <a:t> { readFileSync, mkdirSync } </a:t>
-            </a:r>
-            <a:r>
-              <a:rPr sz="1300" b="1">
+              <a:rPr sz="1300" dirty="0">
+                <a:solidFill>
+                  <a:srgbClr val="E8EEF1"/>
+                </a:solidFill>
+                <a:latin typeface="Consolas"/>
+              </a:rPr>
+              <a:t> { </a:t>
+            </a:r>
+            <a:r>
+              <a:rPr sz="1300" dirty="0" err="1">
+                <a:solidFill>
+                  <a:srgbClr val="E8EEF1"/>
+                </a:solidFill>
+                <a:latin typeface="Consolas"/>
+              </a:rPr>
+              <a:t>readFileSync</a:t>
+            </a:r>
+            <a:r>
+              <a:rPr sz="1300" dirty="0">
+                <a:solidFill>
+                  <a:srgbClr val="E8EEF1"/>
+                </a:solidFill>
+                <a:latin typeface="Consolas"/>
+              </a:rPr>
+              <a:t>, </a:t>
+            </a:r>
+            <a:r>
+              <a:rPr sz="1300" dirty="0" err="1">
+                <a:solidFill>
+                  <a:srgbClr val="E8EEF1"/>
+                </a:solidFill>
+                <a:latin typeface="Consolas"/>
+              </a:rPr>
+              <a:t>mkdirSync</a:t>
+            </a:r>
+            <a:r>
+              <a:rPr sz="1300" dirty="0">
+                <a:solidFill>
+                  <a:srgbClr val="E8EEF1"/>
+                </a:solidFill>
+                <a:latin typeface="Consolas"/>
+              </a:rPr>
+              <a:t> } </a:t>
+            </a:r>
+            <a:r>
+              <a:rPr sz="1300" b="1" dirty="0">
                 <a:solidFill>
                   <a:srgbClr val="5DD8C3"/>
                 </a:solidFill>
@@ -10342,7 +10898,7 @@
               <a:t>from</a:t>
             </a:r>
             <a:r>
-              <a:rPr sz="1300">
+              <a:rPr sz="1300" dirty="0">
                 <a:solidFill>
                   <a:srgbClr val="E8EEF1"/>
                 </a:solidFill>
@@ -10351,7 +10907,7 @@
               <a:t> </a:t>
             </a:r>
             <a:r>
-              <a:rPr sz="1300">
+              <a:rPr sz="1300" dirty="0">
                 <a:solidFill>
                   <a:srgbClr val="FFD27F"/>
                 </a:solidFill>
@@ -10360,7 +10916,7 @@
               <a:t>'fs'</a:t>
             </a:r>
             <a:r>
-              <a:rPr sz="1300">
+              <a:rPr sz="1300" dirty="0">
                 <a:solidFill>
                   <a:srgbClr val="E8EEF1"/>
                 </a:solidFill>
@@ -10372,7 +10928,7 @@
           <a:p>
             <a:pPr algn="l"/>
             <a:r>
-              <a:rPr sz="1300" b="1">
+              <a:rPr sz="1300" b="1" dirty="0">
                 <a:solidFill>
                   <a:srgbClr val="5DD8C3"/>
                 </a:solidFill>
@@ -10381,7 +10937,7 @@
               <a:t>import</a:t>
             </a:r>
             <a:r>
-              <a:rPr sz="1300">
+              <a:rPr sz="1300" dirty="0">
                 <a:solidFill>
                   <a:srgbClr val="E8EEF1"/>
                 </a:solidFill>
@@ -10390,7 +10946,7 @@
               <a:t> path </a:t>
             </a:r>
             <a:r>
-              <a:rPr sz="1300" b="1">
+              <a:rPr sz="1300" b="1" dirty="0">
                 <a:solidFill>
                   <a:srgbClr val="5DD8C3"/>
                 </a:solidFill>
@@ -10399,7 +10955,7 @@
               <a:t>from</a:t>
             </a:r>
             <a:r>
-              <a:rPr sz="1300">
+              <a:rPr sz="1300" dirty="0">
                 <a:solidFill>
                   <a:srgbClr val="E8EEF1"/>
                 </a:solidFill>
@@ -10408,7 +10964,7 @@
               <a:t> </a:t>
             </a:r>
             <a:r>
-              <a:rPr sz="1300">
+              <a:rPr sz="1300" dirty="0">
                 <a:solidFill>
                   <a:srgbClr val="FFD27F"/>
                 </a:solidFill>
@@ -10417,7 +10973,7 @@
               <a:t>'path'</a:t>
             </a:r>
             <a:r>
-              <a:rPr sz="1300">
+              <a:rPr sz="1300" dirty="0">
                 <a:solidFill>
                   <a:srgbClr val="E8EEF1"/>
                 </a:solidFill>
@@ -10429,7 +10985,7 @@
           <a:p>
             <a:pPr algn="l"/>
             <a:r>
-              <a:rPr sz="1300" b="1">
+              <a:rPr sz="1300" b="1" dirty="0">
                 <a:solidFill>
                   <a:srgbClr val="5DD8C3"/>
                 </a:solidFill>
@@ -10438,16 +10994,34 @@
               <a:t>import</a:t>
             </a:r>
             <a:r>
-              <a:rPr sz="1300">
-                <a:solidFill>
-                  <a:srgbClr val="E8EEF1"/>
-                </a:solidFill>
-                <a:latin typeface="Consolas"/>
-              </a:rPr>
-              <a:t> { fileURLToPath } </a:t>
-            </a:r>
-            <a:r>
-              <a:rPr sz="1300" b="1">
+              <a:rPr sz="1300" dirty="0">
+                <a:solidFill>
+                  <a:srgbClr val="E8EEF1"/>
+                </a:solidFill>
+                <a:latin typeface="Consolas"/>
+              </a:rPr>
+              <a:t> { </a:t>
+            </a:r>
+            <a:r>
+              <a:rPr sz="1300" dirty="0" err="1">
+                <a:solidFill>
+                  <a:srgbClr val="E8EEF1"/>
+                </a:solidFill>
+                <a:latin typeface="Consolas"/>
+              </a:rPr>
+              <a:t>fileURLToPath</a:t>
+            </a:r>
+            <a:r>
+              <a:rPr sz="1300" dirty="0">
+                <a:solidFill>
+                  <a:srgbClr val="E8EEF1"/>
+                </a:solidFill>
+                <a:latin typeface="Consolas"/>
+              </a:rPr>
+              <a:t> } </a:t>
+            </a:r>
+            <a:r>
+              <a:rPr sz="1300" b="1" dirty="0">
                 <a:solidFill>
                   <a:srgbClr val="5DD8C3"/>
                 </a:solidFill>
@@ -10456,7 +11030,7 @@
               <a:t>from</a:t>
             </a:r>
             <a:r>
-              <a:rPr sz="1300">
+              <a:rPr sz="1300" dirty="0">
                 <a:solidFill>
                   <a:srgbClr val="E8EEF1"/>
                 </a:solidFill>
@@ -10465,16 +11039,34 @@
               <a:t> </a:t>
             </a:r>
             <a:r>
-              <a:rPr sz="1300">
+              <a:rPr sz="1300" dirty="0">
                 <a:solidFill>
                   <a:srgbClr val="FFD27F"/>
                 </a:solidFill>
                 <a:latin typeface="Consolas"/>
               </a:rPr>
-              <a:t>'url'</a:t>
-            </a:r>
-            <a:r>
-              <a:rPr sz="1300">
+              <a:t>'</a:t>
+            </a:r>
+            <a:r>
+              <a:rPr sz="1300" dirty="0" err="1">
+                <a:solidFill>
+                  <a:srgbClr val="FFD27F"/>
+                </a:solidFill>
+                <a:latin typeface="Consolas"/>
+              </a:rPr>
+              <a:t>url</a:t>
+            </a:r>
+            <a:r>
+              <a:rPr sz="1300" dirty="0">
+                <a:solidFill>
+                  <a:srgbClr val="FFD27F"/>
+                </a:solidFill>
+                <a:latin typeface="Consolas"/>
+              </a:rPr>
+              <a:t>'</a:t>
+            </a:r>
+            <a:r>
+              <a:rPr sz="1300" dirty="0">
                 <a:solidFill>
                   <a:srgbClr val="E8EEF1"/>
                 </a:solidFill>
@@ -10486,7 +11078,7 @@
           <a:p>
             <a:pPr algn="l"/>
             <a:r>
-              <a:rPr sz="1300">
+              <a:rPr sz="1300" dirty="0">
                 <a:solidFill>
                   <a:srgbClr val="E8EEF1"/>
                 </a:solidFill>
@@ -10498,7 +11090,7 @@
           <a:p>
             <a:pPr algn="l"/>
             <a:r>
-              <a:rPr sz="1300" b="1">
+              <a:rPr sz="1300" b="1" dirty="0">
                 <a:solidFill>
                   <a:srgbClr val="5DD8C3"/>
                 </a:solidFill>
@@ -10507,16 +11099,70 @@
               <a:t>const</a:t>
             </a:r>
             <a:r>
-              <a:rPr sz="1300">
-                <a:solidFill>
-                  <a:srgbClr val="E8EEF1"/>
-                </a:solidFill>
-                <a:latin typeface="Consolas"/>
-              </a:rPr>
-              <a:t> __dirname = path.dirname(fileURLToPath(</a:t>
-            </a:r>
-            <a:r>
-              <a:rPr sz="1300" b="1">
+              <a:rPr sz="1300" dirty="0">
+                <a:solidFill>
+                  <a:srgbClr val="E8EEF1"/>
+                </a:solidFill>
+                <a:latin typeface="Consolas"/>
+              </a:rPr>
+              <a:t> __</a:t>
+            </a:r>
+            <a:r>
+              <a:rPr sz="1300" dirty="0" err="1">
+                <a:solidFill>
+                  <a:srgbClr val="E8EEF1"/>
+                </a:solidFill>
+                <a:latin typeface="Consolas"/>
+              </a:rPr>
+              <a:t>dirname</a:t>
+            </a:r>
+            <a:r>
+              <a:rPr sz="1300" dirty="0">
+                <a:solidFill>
+                  <a:srgbClr val="E8EEF1"/>
+                </a:solidFill>
+                <a:latin typeface="Consolas"/>
+              </a:rPr>
+              <a:t> = </a:t>
+            </a:r>
+            <a:r>
+              <a:rPr sz="1300" dirty="0" err="1">
+                <a:solidFill>
+                  <a:srgbClr val="E8EEF1"/>
+                </a:solidFill>
+                <a:latin typeface="Consolas"/>
+              </a:rPr>
+              <a:t>path.dirname</a:t>
+            </a:r>
+            <a:r>
+              <a:rPr sz="1300" dirty="0">
+                <a:solidFill>
+                  <a:srgbClr val="E8EEF1"/>
+                </a:solidFill>
+                <a:latin typeface="Consolas"/>
+              </a:rPr>
+              <a:t>(</a:t>
+            </a:r>
+            <a:r>
+              <a:rPr sz="1300" dirty="0" err="1">
+                <a:solidFill>
+                  <a:srgbClr val="E8EEF1"/>
+                </a:solidFill>
+                <a:latin typeface="Consolas"/>
+              </a:rPr>
+              <a:t>fileURLToPath</a:t>
+            </a:r>
+            <a:r>
+              <a:rPr sz="1300" dirty="0">
+                <a:solidFill>
+                  <a:srgbClr val="E8EEF1"/>
+                </a:solidFill>
+                <a:latin typeface="Consolas"/>
+              </a:rPr>
+              <a:t>(</a:t>
+            </a:r>
+            <a:r>
+              <a:rPr sz="1300" b="1" dirty="0">
                 <a:solidFill>
                   <a:srgbClr val="5DD8C3"/>
                 </a:solidFill>
@@ -10525,7 +11171,7 @@
               <a:t>import</a:t>
             </a:r>
             <a:r>
-              <a:rPr sz="1300">
+              <a:rPr sz="1300" dirty="0">
                 <a:solidFill>
                   <a:srgbClr val="E8EEF1"/>
                 </a:solidFill>
@@ -10537,7 +11183,7 @@
           <a:p>
             <a:pPr algn="l"/>
             <a:r>
-              <a:rPr sz="1300" b="1">
+              <a:rPr sz="1300" b="1" dirty="0">
                 <a:solidFill>
                   <a:srgbClr val="5DD8C3"/>
                 </a:solidFill>
@@ -10546,16 +11192,70 @@
               <a:t>const</a:t>
             </a:r>
             <a:r>
-              <a:rPr sz="1300">
-                <a:solidFill>
-                  <a:srgbClr val="E8EEF1"/>
-                </a:solidFill>
-                <a:latin typeface="Consolas"/>
-              </a:rPr>
-              <a:t> dataDir = path.join(__dirname, </a:t>
-            </a:r>
-            <a:r>
-              <a:rPr sz="1300">
+              <a:rPr sz="1300" dirty="0">
+                <a:solidFill>
+                  <a:srgbClr val="E8EEF1"/>
+                </a:solidFill>
+                <a:latin typeface="Consolas"/>
+              </a:rPr>
+              <a:t> </a:t>
+            </a:r>
+            <a:r>
+              <a:rPr sz="1300" dirty="0" err="1">
+                <a:solidFill>
+                  <a:srgbClr val="E8EEF1"/>
+                </a:solidFill>
+                <a:latin typeface="Consolas"/>
+              </a:rPr>
+              <a:t>dataDir</a:t>
+            </a:r>
+            <a:r>
+              <a:rPr sz="1300" dirty="0">
+                <a:solidFill>
+                  <a:srgbClr val="E8EEF1"/>
+                </a:solidFill>
+                <a:latin typeface="Consolas"/>
+              </a:rPr>
+              <a:t> = </a:t>
+            </a:r>
+            <a:r>
+              <a:rPr sz="1300" dirty="0" err="1">
+                <a:solidFill>
+                  <a:srgbClr val="E8EEF1"/>
+                </a:solidFill>
+                <a:latin typeface="Consolas"/>
+              </a:rPr>
+              <a:t>path.join</a:t>
+            </a:r>
+            <a:r>
+              <a:rPr sz="1300" dirty="0">
+                <a:solidFill>
+                  <a:srgbClr val="E8EEF1"/>
+                </a:solidFill>
+                <a:latin typeface="Consolas"/>
+              </a:rPr>
+              <a:t>(__</a:t>
+            </a:r>
+            <a:r>
+              <a:rPr sz="1300" dirty="0" err="1">
+                <a:solidFill>
+                  <a:srgbClr val="E8EEF1"/>
+                </a:solidFill>
+                <a:latin typeface="Consolas"/>
+              </a:rPr>
+              <a:t>dirname</a:t>
+            </a:r>
+            <a:r>
+              <a:rPr sz="1300" dirty="0">
+                <a:solidFill>
+                  <a:srgbClr val="E8EEF1"/>
+                </a:solidFill>
+                <a:latin typeface="Consolas"/>
+              </a:rPr>
+              <a:t>, </a:t>
+            </a:r>
+            <a:r>
+              <a:rPr sz="1300" dirty="0">
                 <a:solidFill>
                   <a:srgbClr val="FFD27F"/>
                 </a:solidFill>
@@ -10564,7 +11264,7 @@
               <a:t>'../../data'</a:t>
             </a:r>
             <a:r>
-              <a:rPr sz="1300">
+              <a:rPr sz="1300" dirty="0">
                 <a:solidFill>
                   <a:srgbClr val="E8EEF1"/>
                 </a:solidFill>
@@ -10576,16 +11276,43 @@
           <a:p>
             <a:pPr algn="l"/>
             <a:r>
-              <a:rPr sz="1300">
-                <a:solidFill>
-                  <a:srgbClr val="E8EEF1"/>
-                </a:solidFill>
-                <a:latin typeface="Consolas"/>
-              </a:rPr>
-              <a:t>mkdirSync(dataDir, { recursive: </a:t>
-            </a:r>
-            <a:r>
-              <a:rPr sz="1300" b="1">
+              <a:rPr sz="1300" dirty="0" err="1">
+                <a:solidFill>
+                  <a:srgbClr val="E8EEF1"/>
+                </a:solidFill>
+                <a:latin typeface="Consolas"/>
+              </a:rPr>
+              <a:t>mkdirSync</a:t>
+            </a:r>
+            <a:r>
+              <a:rPr sz="1300" dirty="0">
+                <a:solidFill>
+                  <a:srgbClr val="E8EEF1"/>
+                </a:solidFill>
+                <a:latin typeface="Consolas"/>
+              </a:rPr>
+              <a:t>(</a:t>
+            </a:r>
+            <a:r>
+              <a:rPr sz="1300" dirty="0" err="1">
+                <a:solidFill>
+                  <a:srgbClr val="E8EEF1"/>
+                </a:solidFill>
+                <a:latin typeface="Consolas"/>
+              </a:rPr>
+              <a:t>dataDir</a:t>
+            </a:r>
+            <a:r>
+              <a:rPr sz="1300" dirty="0">
+                <a:solidFill>
+                  <a:srgbClr val="E8EEF1"/>
+                </a:solidFill>
+                <a:latin typeface="Consolas"/>
+              </a:rPr>
+              <a:t>, { recursive: </a:t>
+            </a:r>
+            <a:r>
+              <a:rPr sz="1300" b="1" dirty="0">
                 <a:solidFill>
                   <a:srgbClr val="5DD8C3"/>
                 </a:solidFill>
@@ -10594,7 +11321,7 @@
               <a:t>true</a:t>
             </a:r>
             <a:r>
-              <a:rPr sz="1300">
+              <a:rPr sz="1300" dirty="0">
                 <a:solidFill>
                   <a:srgbClr val="E8EEF1"/>
                 </a:solidFill>
@@ -10606,7 +11333,7 @@
           <a:p>
             <a:pPr algn="l"/>
             <a:r>
-              <a:rPr sz="1300">
+              <a:rPr sz="1300" dirty="0">
                 <a:solidFill>
                   <a:srgbClr val="E8EEF1"/>
                 </a:solidFill>
@@ -10618,19 +11345,73 @@
           <a:p>
             <a:pPr algn="l"/>
             <a:r>
-              <a:rPr sz="1300" i="1">
+              <a:rPr sz="1300" i="1" dirty="0">
                 <a:solidFill>
                   <a:srgbClr val="8893A0"/>
                 </a:solidFill>
                 <a:latin typeface="Consolas"/>
               </a:rPr>
-              <a:t>// top-level await: il modulo espone db gia' pronto</a:t>
-            </a:r>
-          </a:p>
-          <a:p>
-            <a:pPr algn="l"/>
-            <a:r>
-              <a:rPr sz="1300" b="1">
+              <a:t>// top-level await: il modulo </a:t>
+            </a:r>
+            <a:r>
+              <a:rPr sz="1300" i="1" dirty="0" err="1">
+                <a:solidFill>
+                  <a:srgbClr val="8893A0"/>
+                </a:solidFill>
+                <a:latin typeface="Consolas"/>
+              </a:rPr>
+              <a:t>espone</a:t>
+            </a:r>
+            <a:r>
+              <a:rPr sz="1300" i="1" dirty="0">
+                <a:solidFill>
+                  <a:srgbClr val="8893A0"/>
+                </a:solidFill>
+                <a:latin typeface="Consolas"/>
+              </a:rPr>
+              <a:t> </a:t>
+            </a:r>
+            <a:r>
+              <a:rPr sz="1300" i="1" dirty="0" err="1">
+                <a:solidFill>
+                  <a:srgbClr val="8893A0"/>
+                </a:solidFill>
+                <a:latin typeface="Consolas"/>
+              </a:rPr>
+              <a:t>db</a:t>
+            </a:r>
+            <a:r>
+              <a:rPr sz="1300" i="1" dirty="0">
+                <a:solidFill>
+                  <a:srgbClr val="8893A0"/>
+                </a:solidFill>
+                <a:latin typeface="Consolas"/>
+              </a:rPr>
+              <a:t> </a:t>
+            </a:r>
+            <a:r>
+              <a:rPr sz="1300" i="1" dirty="0" err="1">
+                <a:solidFill>
+                  <a:srgbClr val="8893A0"/>
+                </a:solidFill>
+                <a:latin typeface="Consolas"/>
+              </a:rPr>
+              <a:t>gia</a:t>
+            </a:r>
+            <a:r>
+              <a:rPr sz="1300" i="1" dirty="0">
+                <a:solidFill>
+                  <a:srgbClr val="8893A0"/>
+                </a:solidFill>
+                <a:latin typeface="Consolas"/>
+              </a:rPr>
+              <a:t>' pronto</a:t>
+            </a:r>
+          </a:p>
+          <a:p>
+            <a:pPr algn="l"/>
+            <a:r>
+              <a:rPr sz="1300" b="1" dirty="0">
                 <a:solidFill>
                   <a:srgbClr val="5DD8C3"/>
                 </a:solidFill>
@@ -10639,16 +11420,34 @@
               <a:t>const</a:t>
             </a:r>
             <a:r>
-              <a:rPr sz="1300">
-                <a:solidFill>
-                  <a:srgbClr val="E8EEF1"/>
-                </a:solidFill>
-                <a:latin typeface="Consolas"/>
-              </a:rPr>
-              <a:t> db = </a:t>
-            </a:r>
-            <a:r>
-              <a:rPr sz="1300" b="1">
+              <a:rPr sz="1300" dirty="0">
+                <a:solidFill>
+                  <a:srgbClr val="E8EEF1"/>
+                </a:solidFill>
+                <a:latin typeface="Consolas"/>
+              </a:rPr>
+              <a:t> </a:t>
+            </a:r>
+            <a:r>
+              <a:rPr sz="1300" dirty="0" err="1">
+                <a:solidFill>
+                  <a:srgbClr val="E8EEF1"/>
+                </a:solidFill>
+                <a:latin typeface="Consolas"/>
+              </a:rPr>
+              <a:t>db</a:t>
+            </a:r>
+            <a:r>
+              <a:rPr sz="1300" dirty="0">
+                <a:solidFill>
+                  <a:srgbClr val="E8EEF1"/>
+                </a:solidFill>
+                <a:latin typeface="Consolas"/>
+              </a:rPr>
+              <a:t> = </a:t>
+            </a:r>
+            <a:r>
+              <a:rPr sz="1300" b="1" dirty="0">
                 <a:solidFill>
                   <a:srgbClr val="5DD8C3"/>
                 </a:solidFill>
@@ -10657,25 +11456,79 @@
               <a:t>await</a:t>
             </a:r>
             <a:r>
-              <a:rPr sz="1300">
-                <a:solidFill>
-                  <a:srgbClr val="E8EEF1"/>
-                </a:solidFill>
-                <a:latin typeface="Consolas"/>
-              </a:rPr>
-              <a:t> open({ filename: path.join(dataDir, </a:t>
-            </a:r>
-            <a:r>
-              <a:rPr sz="1300">
+              <a:rPr sz="1300" dirty="0">
+                <a:solidFill>
+                  <a:srgbClr val="E8EEF1"/>
+                </a:solidFill>
+                <a:latin typeface="Consolas"/>
+              </a:rPr>
+              <a:t> open({ filename: </a:t>
+            </a:r>
+            <a:r>
+              <a:rPr sz="1300" dirty="0" err="1">
+                <a:solidFill>
+                  <a:srgbClr val="E8EEF1"/>
+                </a:solidFill>
+                <a:latin typeface="Consolas"/>
+              </a:rPr>
+              <a:t>path.join</a:t>
+            </a:r>
+            <a:r>
+              <a:rPr sz="1300" dirty="0">
+                <a:solidFill>
+                  <a:srgbClr val="E8EEF1"/>
+                </a:solidFill>
+                <a:latin typeface="Consolas"/>
+              </a:rPr>
+              <a:t>(</a:t>
+            </a:r>
+            <a:r>
+              <a:rPr sz="1300" dirty="0" err="1">
+                <a:solidFill>
+                  <a:srgbClr val="E8EEF1"/>
+                </a:solidFill>
+                <a:latin typeface="Consolas"/>
+              </a:rPr>
+              <a:t>dataDir</a:t>
+            </a:r>
+            <a:r>
+              <a:rPr sz="1300" dirty="0">
+                <a:solidFill>
+                  <a:srgbClr val="E8EEF1"/>
+                </a:solidFill>
+                <a:latin typeface="Consolas"/>
+              </a:rPr>
+              <a:t>, </a:t>
+            </a:r>
+            <a:r>
+              <a:rPr sz="1300" dirty="0">
                 <a:solidFill>
                   <a:srgbClr val="FFD27F"/>
                 </a:solidFill>
                 <a:latin typeface="Consolas"/>
               </a:rPr>
-              <a:t>'app.db'</a:t>
-            </a:r>
-            <a:r>
-              <a:rPr sz="1300">
+              <a:t>'</a:t>
+            </a:r>
+            <a:r>
+              <a:rPr sz="1300" dirty="0" err="1">
+                <a:solidFill>
+                  <a:srgbClr val="FFD27F"/>
+                </a:solidFill>
+                <a:latin typeface="Consolas"/>
+              </a:rPr>
+              <a:t>app.db</a:t>
+            </a:r>
+            <a:r>
+              <a:rPr sz="1300" dirty="0">
+                <a:solidFill>
+                  <a:srgbClr val="FFD27F"/>
+                </a:solidFill>
+                <a:latin typeface="Consolas"/>
+              </a:rPr>
+              <a:t>'</a:t>
+            </a:r>
+            <a:r>
+              <a:rPr sz="1300" dirty="0">
                 <a:solidFill>
                   <a:srgbClr val="E8EEF1"/>
                 </a:solidFill>
@@ -10687,7 +11540,7 @@
           <a:p>
             <a:pPr algn="l"/>
             <a:r>
-              <a:rPr sz="1300">
+              <a:rPr sz="1300" dirty="0">
                 <a:solidFill>
                   <a:srgbClr val="E8EEF1"/>
                 </a:solidFill>
@@ -10699,7 +11552,7 @@
           <a:p>
             <a:pPr algn="l"/>
             <a:r>
-              <a:rPr sz="1300">
+              <a:rPr sz="1300" dirty="0">
                 <a:solidFill>
                   <a:srgbClr val="E8EEF1"/>
                 </a:solidFill>
@@ -10711,7 +11564,7 @@
           <a:p>
             <a:pPr algn="l"/>
             <a:r>
-              <a:rPr sz="1300" b="1">
+              <a:rPr sz="1300" b="1" dirty="0">
                 <a:solidFill>
                   <a:srgbClr val="5DD8C3"/>
                 </a:solidFill>
@@ -10720,25 +11573,97 @@
               <a:t>const</a:t>
             </a:r>
             <a:r>
-              <a:rPr sz="1300">
-                <a:solidFill>
-                  <a:srgbClr val="E8EEF1"/>
-                </a:solidFill>
-                <a:latin typeface="Consolas"/>
-              </a:rPr>
-              <a:t> schema = readFileSync(path.join(__dirname, </a:t>
-            </a:r>
-            <a:r>
-              <a:rPr sz="1300">
+              <a:rPr sz="1300" dirty="0">
+                <a:solidFill>
+                  <a:srgbClr val="E8EEF1"/>
+                </a:solidFill>
+                <a:latin typeface="Consolas"/>
+              </a:rPr>
+              <a:t> schema = </a:t>
+            </a:r>
+            <a:r>
+              <a:rPr sz="1300" dirty="0" err="1">
+                <a:solidFill>
+                  <a:srgbClr val="E8EEF1"/>
+                </a:solidFill>
+                <a:latin typeface="Consolas"/>
+              </a:rPr>
+              <a:t>readFileSync</a:t>
+            </a:r>
+            <a:r>
+              <a:rPr sz="1300" dirty="0">
+                <a:solidFill>
+                  <a:srgbClr val="E8EEF1"/>
+                </a:solidFill>
+                <a:latin typeface="Consolas"/>
+              </a:rPr>
+              <a:t>(</a:t>
+            </a:r>
+            <a:r>
+              <a:rPr sz="1300" dirty="0" err="1">
+                <a:solidFill>
+                  <a:srgbClr val="E8EEF1"/>
+                </a:solidFill>
+                <a:latin typeface="Consolas"/>
+              </a:rPr>
+              <a:t>path.join</a:t>
+            </a:r>
+            <a:r>
+              <a:rPr sz="1300" dirty="0">
+                <a:solidFill>
+                  <a:srgbClr val="E8EEF1"/>
+                </a:solidFill>
+                <a:latin typeface="Consolas"/>
+              </a:rPr>
+              <a:t>(__</a:t>
+            </a:r>
+            <a:r>
+              <a:rPr sz="1300" dirty="0" err="1">
+                <a:solidFill>
+                  <a:srgbClr val="E8EEF1"/>
+                </a:solidFill>
+                <a:latin typeface="Consolas"/>
+              </a:rPr>
+              <a:t>dirname</a:t>
+            </a:r>
+            <a:r>
+              <a:rPr sz="1300" dirty="0">
+                <a:solidFill>
+                  <a:srgbClr val="E8EEF1"/>
+                </a:solidFill>
+                <a:latin typeface="Consolas"/>
+              </a:rPr>
+              <a:t>, </a:t>
+            </a:r>
+            <a:r>
+              <a:rPr sz="1300" dirty="0">
                 <a:solidFill>
                   <a:srgbClr val="FFD27F"/>
                 </a:solidFill>
                 <a:latin typeface="Consolas"/>
               </a:rPr>
-              <a:t>'schema.sql'</a:t>
-            </a:r>
-            <a:r>
-              <a:rPr sz="1300">
+              <a:t>'</a:t>
+            </a:r>
+            <a:r>
+              <a:rPr sz="1300" dirty="0" err="1">
+                <a:solidFill>
+                  <a:srgbClr val="FFD27F"/>
+                </a:solidFill>
+                <a:latin typeface="Consolas"/>
+              </a:rPr>
+              <a:t>schema.sql</a:t>
+            </a:r>
+            <a:r>
+              <a:rPr sz="1300" dirty="0">
+                <a:solidFill>
+                  <a:srgbClr val="FFD27F"/>
+                </a:solidFill>
+                <a:latin typeface="Consolas"/>
+              </a:rPr>
+              <a:t>'</a:t>
+            </a:r>
+            <a:r>
+              <a:rPr sz="1300" dirty="0">
                 <a:solidFill>
                   <a:srgbClr val="E8EEF1"/>
                 </a:solidFill>
@@ -10747,7 +11672,7 @@
               <a:t>), </a:t>
             </a:r>
             <a:r>
-              <a:rPr sz="1300">
+              <a:rPr sz="1300" dirty="0">
                 <a:solidFill>
                   <a:srgbClr val="FFD27F"/>
                 </a:solidFill>
@@ -10756,7 +11681,7 @@
               <a:t>'utf-8'</a:t>
             </a:r>
             <a:r>
-              <a:rPr sz="1300">
+              <a:rPr sz="1300" dirty="0">
                 <a:solidFill>
                   <a:srgbClr val="E8EEF1"/>
                 </a:solidFill>
@@ -10768,7 +11693,7 @@
           <a:p>
             <a:pPr algn="l"/>
             <a:r>
-              <a:rPr sz="1300" b="1">
+              <a:rPr sz="1300" b="1" dirty="0">
                 <a:solidFill>
                   <a:srgbClr val="5DD8C3"/>
                 </a:solidFill>
@@ -10777,19 +11702,7 @@
               <a:t>await</a:t>
             </a:r>
             <a:r>
-              <a:rPr sz="1300">
-                <a:solidFill>
-                  <a:srgbClr val="E8EEF1"/>
-                </a:solidFill>
-                <a:latin typeface="Consolas"/>
-              </a:rPr>
-              <a:t> db.exec(schema);</a:t>
-            </a:r>
-          </a:p>
-          <a:p>
-            <a:pPr algn="l"/>
-            <a:r>
-              <a:rPr sz="1300">
+              <a:rPr sz="1300" dirty="0">
                 <a:solidFill>
                   <a:srgbClr val="E8EEF1"/>
                 </a:solidFill>
@@ -10797,11 +11710,41 @@
               </a:rPr>
               <a:t> </a:t>
             </a:r>
-          </a:p>
-          <a:p>
-            <a:pPr algn="l"/>
-            <a:r>
-              <a:rPr sz="1300" b="1">
+            <a:r>
+              <a:rPr sz="1300" dirty="0" err="1">
+                <a:solidFill>
+                  <a:srgbClr val="E8EEF1"/>
+                </a:solidFill>
+                <a:latin typeface="Consolas"/>
+              </a:rPr>
+              <a:t>db.exec</a:t>
+            </a:r>
+            <a:r>
+              <a:rPr sz="1300" dirty="0">
+                <a:solidFill>
+                  <a:srgbClr val="E8EEF1"/>
+                </a:solidFill>
+                <a:latin typeface="Consolas"/>
+              </a:rPr>
+              <a:t>(schema);</a:t>
+            </a:r>
+          </a:p>
+          <a:p>
+            <a:pPr algn="l"/>
+            <a:r>
+              <a:rPr sz="1300" dirty="0">
+                <a:solidFill>
+                  <a:srgbClr val="E8EEF1"/>
+                </a:solidFill>
+                <a:latin typeface="Consolas"/>
+              </a:rPr>
+              <a:t> </a:t>
+            </a:r>
+          </a:p>
+          <a:p>
+            <a:pPr algn="l"/>
+            <a:r>
+              <a:rPr sz="1300" b="1" dirty="0">
                 <a:solidFill>
                   <a:srgbClr val="5DD8C3"/>
                 </a:solidFill>
@@ -10810,7 +11753,7 @@
               <a:t>export</a:t>
             </a:r>
             <a:r>
-              <a:rPr sz="1300">
+              <a:rPr sz="1300" dirty="0">
                 <a:solidFill>
                   <a:srgbClr val="E8EEF1"/>
                 </a:solidFill>
@@ -10819,7 +11762,7 @@
               <a:t> </a:t>
             </a:r>
             <a:r>
-              <a:rPr sz="1300" b="1">
+              <a:rPr sz="1300" b="1" dirty="0">
                 <a:solidFill>
                   <a:srgbClr val="5DD8C3"/>
                 </a:solidFill>
@@ -10828,13 +11771,31 @@
               <a:t>default</a:t>
             </a:r>
             <a:r>
-              <a:rPr sz="1300">
-                <a:solidFill>
-                  <a:srgbClr val="E8EEF1"/>
-                </a:solidFill>
-                <a:latin typeface="Consolas"/>
-              </a:rPr>
-              <a:t> db;</a:t>
+              <a:rPr sz="1300" dirty="0">
+                <a:solidFill>
+                  <a:srgbClr val="E8EEF1"/>
+                </a:solidFill>
+                <a:latin typeface="Consolas"/>
+              </a:rPr>
+              <a:t> </a:t>
+            </a:r>
+            <a:r>
+              <a:rPr sz="1300" dirty="0" err="1">
+                <a:solidFill>
+                  <a:srgbClr val="E8EEF1"/>
+                </a:solidFill>
+                <a:latin typeface="Consolas"/>
+              </a:rPr>
+              <a:t>db</a:t>
+            </a:r>
+            <a:r>
+              <a:rPr sz="1300" dirty="0">
+                <a:solidFill>
+                  <a:srgbClr val="E8EEF1"/>
+                </a:solidFill>
+                <a:latin typeface="Consolas"/>
+              </a:rPr>
+              <a:t>;</a:t>
             </a:r>
           </a:p>
         </p:txBody>
@@ -17181,29 +18142,35 @@
         <p:spPr>
           <a:xfrm>
             <a:off x="7955279" y="3383280"/>
-            <a:ext cx="3657600" cy="365760"/>
-          </a:xfrm>
-          <a:prstGeom prst="rect">
-            <a:avLst/>
-          </a:prstGeom>
-          <a:noFill/>
-        </p:spPr>
-        <p:txBody>
-          <a:bodyPr wrap="square" lIns="0" tIns="0" rIns="0" bIns="0" anchor="t">
-            <a:spAutoFit/>
-          </a:bodyPr>
-          <a:lstStyle/>
-          <a:p>
-            <a:pPr algn="l"/>
-            <a:r>
-              <a:rPr sz="1100" b="1">
+            <a:ext cx="3657600" cy="169277"/>
+          </a:xfrm>
+          <a:prstGeom prst="rect">
+            <a:avLst/>
+          </a:prstGeom>
+          <a:noFill/>
+        </p:spPr>
+        <p:txBody>
+          <a:bodyPr wrap="square" lIns="0" tIns="0" rIns="0" bIns="0" anchor="t">
+            <a:spAutoFit/>
+          </a:bodyPr>
+          <a:lstStyle/>
+          <a:p>
+            <a:pPr algn="l"/>
+            <a:r>
+              <a:rPr lang="it-IT" sz="1100" b="1">
                 <a:solidFill>
                   <a:srgbClr val="00A69D"/>
                 </a:solidFill>
                 <a:latin typeface="Open Sans"/>
               </a:rPr>
-              <a:t>POMERIGGIO</a:t>
-            </a:r>
+              <a:t>PARTE 2</a:t>
+            </a:r>
+            <a:endParaRPr sz="1100" b="1" dirty="0">
+              <a:solidFill>
+                <a:srgbClr val="00A69D"/>
+              </a:solidFill>
+              <a:latin typeface="Open Sans"/>
+            </a:endParaRPr>
           </a:p>
         </p:txBody>
       </p:sp>
@@ -17583,28 +18550,109 @@
         <p:spPr>
           <a:xfrm>
             <a:off x="868680" y="1325880"/>
-            <a:ext cx="10515600" cy="548640"/>
-          </a:xfrm>
-          <a:prstGeom prst="rect">
-            <a:avLst/>
-          </a:prstGeom>
-          <a:noFill/>
-        </p:spPr>
-        <p:txBody>
-          <a:bodyPr wrap="square" lIns="0" tIns="0" rIns="0" bIns="0" anchor="t">
-            <a:spAutoFit/>
-          </a:bodyPr>
-          <a:lstStyle/>
-          <a:p>
-            <a:pPr algn="l"/>
-            <a:r>
-              <a:rPr sz="1500" b="0">
+            <a:ext cx="10515600" cy="230832"/>
+          </a:xfrm>
+          <a:prstGeom prst="rect">
+            <a:avLst/>
+          </a:prstGeom>
+          <a:noFill/>
+        </p:spPr>
+        <p:txBody>
+          <a:bodyPr wrap="square" lIns="0" tIns="0" rIns="0" bIns="0" anchor="t">
+            <a:spAutoFit/>
+          </a:bodyPr>
+          <a:lstStyle/>
+          <a:p>
+            <a:pPr algn="l"/>
+            <a:r>
+              <a:rPr sz="1500" b="0" dirty="0">
                 <a:solidFill>
                   <a:srgbClr val="555667"/>
                 </a:solidFill>
                 <a:latin typeface="Open Sans"/>
               </a:rPr>
-              <a:t>La tabella più importante che porti a casa oggi.</a:t>
+              <a:t>La </a:t>
+            </a:r>
+            <a:r>
+              <a:rPr sz="1500" b="0" dirty="0" err="1">
+                <a:solidFill>
+                  <a:srgbClr val="555667"/>
+                </a:solidFill>
+                <a:latin typeface="Open Sans"/>
+              </a:rPr>
+              <a:t>tabella</a:t>
+            </a:r>
+            <a:r>
+              <a:rPr sz="1500" b="0" dirty="0">
+                <a:solidFill>
+                  <a:srgbClr val="555667"/>
+                </a:solidFill>
+                <a:latin typeface="Open Sans"/>
+              </a:rPr>
+              <a:t> </a:t>
+            </a:r>
+            <a:r>
+              <a:rPr lang="it-IT" sz="1500" b="0" dirty="0">
+                <a:solidFill>
+                  <a:srgbClr val="555667"/>
+                </a:solidFill>
+                <a:latin typeface="Open Sans"/>
+              </a:rPr>
+              <a:t>delle cose </a:t>
+            </a:r>
+            <a:r>
+              <a:rPr sz="1500" b="0" dirty="0" err="1">
+                <a:solidFill>
+                  <a:srgbClr val="555667"/>
+                </a:solidFill>
+                <a:latin typeface="Open Sans"/>
+              </a:rPr>
+              <a:t>che</a:t>
+            </a:r>
+            <a:r>
+              <a:rPr sz="1500" b="0" dirty="0">
+                <a:solidFill>
+                  <a:srgbClr val="555667"/>
+                </a:solidFill>
+                <a:latin typeface="Open Sans"/>
+              </a:rPr>
+              <a:t> </a:t>
+            </a:r>
+            <a:r>
+              <a:rPr sz="1500" b="0" dirty="0" err="1">
+                <a:solidFill>
+                  <a:srgbClr val="555667"/>
+                </a:solidFill>
+                <a:latin typeface="Open Sans"/>
+              </a:rPr>
+              <a:t>porti</a:t>
+            </a:r>
+            <a:r>
+              <a:rPr sz="1500" b="0" dirty="0">
+                <a:solidFill>
+                  <a:srgbClr val="555667"/>
+                </a:solidFill>
+                <a:latin typeface="Open Sans"/>
+              </a:rPr>
+              <a:t> a casa </a:t>
+            </a:r>
+            <a:r>
+              <a:rPr sz="1500" b="0" dirty="0" err="1">
+                <a:solidFill>
+                  <a:srgbClr val="555667"/>
+                </a:solidFill>
+                <a:latin typeface="Open Sans"/>
+              </a:rPr>
+              <a:t>oggi</a:t>
+            </a:r>
+            <a:r>
+              <a:rPr sz="1500" b="0" dirty="0">
+                <a:solidFill>
+                  <a:srgbClr val="555667"/>
+                </a:solidFill>
+                <a:latin typeface="Open Sans"/>
+              </a:rPr>
+              <a:t>.</a:t>
             </a:r>
           </a:p>
         </p:txBody>
@@ -18699,7 +19747,7 @@
           <a:p>
             <a:pPr algn="l"/>
             <a:r>
-              <a:rPr sz="1400" b="0">
+              <a:rPr sz="1400" b="0" dirty="0">
                 <a:solidFill>
                   <a:srgbClr val="555667"/>
                 </a:solidFill>
@@ -18711,73 +19759,169 @@
           <a:p>
             <a:pPr algn="l"/>
             <a:r>
-              <a:rPr sz="1400" b="0">
+              <a:rPr sz="1400" b="0" dirty="0">
                 <a:solidFill>
                   <a:srgbClr val="555667"/>
                 </a:solidFill>
                 <a:latin typeface="Open Sans"/>
               </a:rPr>
-              <a:t>Error handler centralizzato + AppError</a:t>
-            </a:r>
-          </a:p>
-          <a:p>
-            <a:pPr algn="l"/>
-            <a:r>
-              <a:rPr sz="1400" b="0">
+              <a:t>Error handler </a:t>
+            </a:r>
+            <a:r>
+              <a:rPr sz="1400" b="0" dirty="0" err="1">
                 <a:solidFill>
                   <a:srgbClr val="555667"/>
                 </a:solidFill>
                 <a:latin typeface="Open Sans"/>
               </a:rPr>
-              <a:t>asyncHandler per route async</a:t>
-            </a:r>
-          </a:p>
-          <a:p>
-            <a:pPr algn="l"/>
-            <a:r>
-              <a:rPr sz="1400" b="0">
+              <a:t>centralizzato</a:t>
+            </a:r>
+            <a:r>
+              <a:rPr sz="1400" b="0" dirty="0">
                 <a:solidFill>
                   <a:srgbClr val="555667"/>
                 </a:solidFill>
                 <a:latin typeface="Open Sans"/>
               </a:rPr>
-              <a:t>SQLite con sqlite3 + sqlite (async/await)</a:t>
-            </a:r>
-          </a:p>
-          <a:p>
-            <a:pPr algn="l"/>
-            <a:r>
-              <a:rPr sz="1400" b="0">
+              <a:t> + </a:t>
+            </a:r>
+            <a:r>
+              <a:rPr sz="1400" b="0" dirty="0" err="1">
                 <a:solidFill>
                   <a:srgbClr val="555667"/>
                 </a:solidFill>
                 <a:latin typeface="Open Sans"/>
               </a:rPr>
-              <a:t>Schema users con UNIQUE su email</a:t>
-            </a:r>
-          </a:p>
-          <a:p>
-            <a:pPr algn="l"/>
-            <a:r>
-              <a:rPr sz="1400" b="0">
+              <a:t>AppError</a:t>
+            </a:r>
+            <a:endParaRPr sz="1400" b="0" dirty="0">
+              <a:solidFill>
+                <a:srgbClr val="555667"/>
+              </a:solidFill>
+              <a:latin typeface="Open Sans"/>
+            </a:endParaRPr>
+          </a:p>
+          <a:p>
+            <a:pPr algn="l"/>
+            <a:r>
+              <a:rPr sz="1400" b="0" dirty="0" err="1">
                 <a:solidFill>
                   <a:srgbClr val="555667"/>
                 </a:solidFill>
                 <a:latin typeface="Open Sans"/>
               </a:rPr>
-              <a:t>UserRepository (find/create/update/delete)</a:t>
-            </a:r>
-          </a:p>
-          <a:p>
-            <a:pPr algn="l"/>
-            <a:r>
-              <a:rPr sz="1400" b="0">
+              <a:t>asyncHandler</a:t>
+            </a:r>
+            <a:r>
+              <a:rPr sz="1400" b="0" dirty="0">
                 <a:solidFill>
                   <a:srgbClr val="555667"/>
                 </a:solidFill>
                 <a:latin typeface="Open Sans"/>
               </a:rPr>
-              <a:t>Struttura a layer completa</a:t>
+              <a:t> per route async</a:t>
+            </a:r>
+          </a:p>
+          <a:p>
+            <a:pPr algn="l"/>
+            <a:r>
+              <a:rPr sz="1400" b="0" dirty="0">
+                <a:solidFill>
+                  <a:srgbClr val="555667"/>
+                </a:solidFill>
+                <a:latin typeface="Open Sans"/>
+              </a:rPr>
+              <a:t>SQLite con sqlite3 + </a:t>
+            </a:r>
+            <a:r>
+              <a:rPr sz="1400" b="0" dirty="0" err="1">
+                <a:solidFill>
+                  <a:srgbClr val="555667"/>
+                </a:solidFill>
+                <a:latin typeface="Open Sans"/>
+              </a:rPr>
+              <a:t>sqlite</a:t>
+            </a:r>
+            <a:r>
+              <a:rPr sz="1400" b="0" dirty="0">
+                <a:solidFill>
+                  <a:srgbClr val="555667"/>
+                </a:solidFill>
+                <a:latin typeface="Open Sans"/>
+              </a:rPr>
+              <a:t> (async/await)</a:t>
+            </a:r>
+          </a:p>
+          <a:p>
+            <a:pPr algn="l"/>
+            <a:r>
+              <a:rPr sz="1400" b="0" dirty="0">
+                <a:solidFill>
+                  <a:srgbClr val="555667"/>
+                </a:solidFill>
+                <a:latin typeface="Open Sans"/>
+              </a:rPr>
+              <a:t>Schema users con UNIQUE </a:t>
+            </a:r>
+            <a:r>
+              <a:rPr sz="1400" b="0" dirty="0" err="1">
+                <a:solidFill>
+                  <a:srgbClr val="555667"/>
+                </a:solidFill>
+                <a:latin typeface="Open Sans"/>
+              </a:rPr>
+              <a:t>su</a:t>
+            </a:r>
+            <a:r>
+              <a:rPr sz="1400" b="0" dirty="0">
+                <a:solidFill>
+                  <a:srgbClr val="555667"/>
+                </a:solidFill>
+                <a:latin typeface="Open Sans"/>
+              </a:rPr>
+              <a:t> email</a:t>
+            </a:r>
+          </a:p>
+          <a:p>
+            <a:pPr algn="l"/>
+            <a:r>
+              <a:rPr sz="1400" b="0" dirty="0" err="1">
+                <a:solidFill>
+                  <a:srgbClr val="555667"/>
+                </a:solidFill>
+                <a:latin typeface="Open Sans"/>
+              </a:rPr>
+              <a:t>UserRepository</a:t>
+            </a:r>
+            <a:r>
+              <a:rPr sz="1400" b="0" dirty="0">
+                <a:solidFill>
+                  <a:srgbClr val="555667"/>
+                </a:solidFill>
+                <a:latin typeface="Open Sans"/>
+              </a:rPr>
+              <a:t> (find/create/update/delete)</a:t>
+            </a:r>
+          </a:p>
+          <a:p>
+            <a:pPr algn="l"/>
+            <a:r>
+              <a:rPr sz="1400" b="0" dirty="0" err="1">
+                <a:solidFill>
+                  <a:srgbClr val="555667"/>
+                </a:solidFill>
+                <a:latin typeface="Open Sans"/>
+              </a:rPr>
+              <a:t>Struttura</a:t>
+            </a:r>
+            <a:r>
+              <a:rPr sz="1400" b="0" dirty="0">
+                <a:solidFill>
+                  <a:srgbClr val="555667"/>
+                </a:solidFill>
+                <a:latin typeface="Open Sans"/>
+              </a:rPr>
+              <a:t> a layer completa</a:t>
             </a:r>
           </a:p>
         </p:txBody>
@@ -18791,28 +19935,28 @@
         <p:spPr>
           <a:xfrm>
             <a:off x="6355080" y="1828800"/>
-            <a:ext cx="5212080" cy="365760"/>
-          </a:xfrm>
-          <a:prstGeom prst="rect">
-            <a:avLst/>
-          </a:prstGeom>
-          <a:noFill/>
-        </p:spPr>
-        <p:txBody>
-          <a:bodyPr wrap="square" lIns="0" tIns="0" rIns="0" bIns="0" anchor="t">
-            <a:spAutoFit/>
-          </a:bodyPr>
-          <a:lstStyle/>
-          <a:p>
-            <a:pPr algn="l"/>
-            <a:r>
-              <a:rPr sz="1100" b="1">
+            <a:ext cx="5212080" cy="169277"/>
+          </a:xfrm>
+          <a:prstGeom prst="rect">
+            <a:avLst/>
+          </a:prstGeom>
+          <a:noFill/>
+        </p:spPr>
+        <p:txBody>
+          <a:bodyPr wrap="square" lIns="0" tIns="0" rIns="0" bIns="0" anchor="t">
+            <a:spAutoFit/>
+          </a:bodyPr>
+          <a:lstStyle/>
+          <a:p>
+            <a:pPr algn="l"/>
+            <a:r>
+              <a:rPr sz="1100" b="1" dirty="0">
                 <a:solidFill>
                   <a:srgbClr val="00A69D"/>
                 </a:solidFill>
                 <a:latin typeface="Open Sans"/>
               </a:rPr>
-              <a:t>POMERIGGIO (PARTE 2)</a:t>
+              <a:t>PARTE 2</a:t>
             </a:r>
           </a:p>
         </p:txBody>
@@ -21567,31 +22711,121 @@
           <a:p>
             <a:pPr algn="l"/>
             <a:r>
-              <a:rPr sz="1500" b="0">
+              <a:rPr sz="1500" b="0" dirty="0">
                 <a:solidFill>
                   <a:srgbClr val="555667"/>
                 </a:solidFill>
                 <a:latin typeface="Open Sans"/>
               </a:rPr>
-              <a:t>Parsing (json, urlencoded, cors, helmet) → in CIMA, prima delle route.</a:t>
-            </a:r>
-          </a:p>
-          <a:p>
-            <a:pPr algn="l"/>
-            <a:r>
-              <a:rPr sz="1500" b="0">
+              <a:t>Parsing (</a:t>
+            </a:r>
+            <a:r>
+              <a:rPr sz="1500" b="0" dirty="0" err="1">
                 <a:solidFill>
                   <a:srgbClr val="555667"/>
                 </a:solidFill>
                 <a:latin typeface="Open Sans"/>
               </a:rPr>
-              <a:t>Auth → PRIMA delle route che protegge.</a:t>
-            </a:r>
-          </a:p>
-          <a:p>
-            <a:pPr algn="l"/>
-            <a:r>
-              <a:rPr sz="1500" b="0">
+              <a:t>json</a:t>
+            </a:r>
+            <a:r>
+              <a:rPr sz="1500" b="0" dirty="0">
+                <a:solidFill>
+                  <a:srgbClr val="555667"/>
+                </a:solidFill>
+                <a:latin typeface="Open Sans"/>
+              </a:rPr>
+              <a:t>, </a:t>
+            </a:r>
+            <a:r>
+              <a:rPr sz="1500" b="0" dirty="0" err="1">
+                <a:solidFill>
+                  <a:srgbClr val="555667"/>
+                </a:solidFill>
+                <a:latin typeface="Open Sans"/>
+              </a:rPr>
+              <a:t>urlencoded</a:t>
+            </a:r>
+            <a:r>
+              <a:rPr sz="1500" b="0" dirty="0">
+                <a:solidFill>
+                  <a:srgbClr val="555667"/>
+                </a:solidFill>
+                <a:latin typeface="Open Sans"/>
+              </a:rPr>
+              <a:t>, </a:t>
+            </a:r>
+            <a:r>
+              <a:rPr sz="1500" b="0" dirty="0" err="1">
+                <a:solidFill>
+                  <a:srgbClr val="555667"/>
+                </a:solidFill>
+                <a:latin typeface="Open Sans"/>
+              </a:rPr>
+              <a:t>cors</a:t>
+            </a:r>
+            <a:r>
+              <a:rPr sz="1500" b="0" dirty="0">
+                <a:solidFill>
+                  <a:srgbClr val="555667"/>
+                </a:solidFill>
+                <a:latin typeface="Open Sans"/>
+              </a:rPr>
+              <a:t>, helmet) → in CIMA, prima delle route.</a:t>
+            </a:r>
+          </a:p>
+          <a:p>
+            <a:pPr algn="l"/>
+            <a:r>
+              <a:rPr sz="1500" b="0" dirty="0">
+                <a:solidFill>
+                  <a:srgbClr val="555667"/>
+                </a:solidFill>
+                <a:latin typeface="Open Sans"/>
+              </a:rPr>
+              <a:t>Auth → PRIMA delle route </a:t>
+            </a:r>
+            <a:r>
+              <a:rPr sz="1500" b="0" dirty="0" err="1">
+                <a:solidFill>
+                  <a:srgbClr val="555667"/>
+                </a:solidFill>
+                <a:latin typeface="Open Sans"/>
+              </a:rPr>
+              <a:t>che</a:t>
+            </a:r>
+            <a:r>
+              <a:rPr sz="1500" b="0" dirty="0">
+                <a:solidFill>
+                  <a:srgbClr val="555667"/>
+                </a:solidFill>
+                <a:latin typeface="Open Sans"/>
+              </a:rPr>
+              <a:t> </a:t>
+            </a:r>
+            <a:r>
+              <a:rPr sz="1500" b="0" dirty="0" err="1">
+                <a:solidFill>
+                  <a:srgbClr val="555667"/>
+                </a:solidFill>
+                <a:latin typeface="Open Sans"/>
+              </a:rPr>
+              <a:t>protegge</a:t>
+            </a:r>
+            <a:r>
+              <a:rPr sz="1500" b="0" dirty="0">
+                <a:solidFill>
+                  <a:srgbClr val="555667"/>
+                </a:solidFill>
+                <a:latin typeface="Open Sans"/>
+              </a:rPr>
+              <a:t>.</a:t>
+            </a:r>
+          </a:p>
+          <a:p>
+            <a:pPr algn="l"/>
+            <a:r>
+              <a:rPr sz="1500" b="0" dirty="0">
                 <a:solidFill>
                   <a:srgbClr val="555667"/>
                 </a:solidFill>
@@ -23673,37 +24907,307 @@
           <a:p>
             <a:pPr algn="l"/>
             <a:r>
-              <a:rPr sz="1500" b="0">
+              <a:rPr sz="1500" b="0" dirty="0">
                 <a:solidFill>
                   <a:srgbClr val="555667"/>
                 </a:solidFill>
                 <a:latin typeface="Open Sans"/>
               </a:rPr>
-              <a:t>Il client non sa cosa aspettarsi. La gestione errori è duplicata in N posti.</a:t>
-            </a:r>
-          </a:p>
-          <a:p>
-            <a:pPr algn="l"/>
-            <a:r>
-              <a:rPr sz="1500" b="0">
+              <a:t>Il client non </a:t>
+            </a:r>
+            <a:r>
+              <a:rPr sz="1500" b="0" dirty="0" err="1">
                 <a:solidFill>
                   <a:srgbClr val="555667"/>
                 </a:solidFill>
                 <a:latin typeface="Open Sans"/>
               </a:rPr>
-              <a:t>E quando un controller async lancia un'eccezione non catturata,</a:t>
-            </a:r>
-          </a:p>
-          <a:p>
-            <a:pPr algn="l"/>
-            <a:r>
-              <a:rPr sz="1500" b="0">
+              <a:t>sa</a:t>
+            </a:r>
+            <a:r>
+              <a:rPr sz="1500" b="0" dirty="0">
                 <a:solidFill>
                   <a:srgbClr val="555667"/>
                 </a:solidFill>
                 <a:latin typeface="Open Sans"/>
               </a:rPr>
-              <a:t>Express manda HTML brutto al client. Soluzione: centralizzare.</a:t>
+              <a:t> </a:t>
+            </a:r>
+            <a:r>
+              <a:rPr sz="1500" b="0" dirty="0" err="1">
+                <a:solidFill>
+                  <a:srgbClr val="555667"/>
+                </a:solidFill>
+                <a:latin typeface="Open Sans"/>
+              </a:rPr>
+              <a:t>cosa</a:t>
+            </a:r>
+            <a:r>
+              <a:rPr sz="1500" b="0" dirty="0">
+                <a:solidFill>
+                  <a:srgbClr val="555667"/>
+                </a:solidFill>
+                <a:latin typeface="Open Sans"/>
+              </a:rPr>
+              <a:t> </a:t>
+            </a:r>
+            <a:r>
+              <a:rPr sz="1500" b="0" dirty="0" err="1">
+                <a:solidFill>
+                  <a:srgbClr val="555667"/>
+                </a:solidFill>
+                <a:latin typeface="Open Sans"/>
+              </a:rPr>
+              <a:t>aspettarsi</a:t>
+            </a:r>
+            <a:r>
+              <a:rPr sz="1500" b="0" dirty="0">
+                <a:solidFill>
+                  <a:srgbClr val="555667"/>
+                </a:solidFill>
+                <a:latin typeface="Open Sans"/>
+              </a:rPr>
+              <a:t>. La </a:t>
+            </a:r>
+            <a:r>
+              <a:rPr sz="1500" b="0" dirty="0" err="1">
+                <a:solidFill>
+                  <a:srgbClr val="555667"/>
+                </a:solidFill>
+                <a:latin typeface="Open Sans"/>
+              </a:rPr>
+              <a:t>gestione</a:t>
+            </a:r>
+            <a:r>
+              <a:rPr sz="1500" b="0" dirty="0">
+                <a:solidFill>
+                  <a:srgbClr val="555667"/>
+                </a:solidFill>
+                <a:latin typeface="Open Sans"/>
+              </a:rPr>
+              <a:t> </a:t>
+            </a:r>
+            <a:r>
+              <a:rPr sz="1500" b="0" dirty="0" err="1">
+                <a:solidFill>
+                  <a:srgbClr val="555667"/>
+                </a:solidFill>
+                <a:latin typeface="Open Sans"/>
+              </a:rPr>
+              <a:t>errori</a:t>
+            </a:r>
+            <a:r>
+              <a:rPr sz="1500" b="0" dirty="0">
+                <a:solidFill>
+                  <a:srgbClr val="555667"/>
+                </a:solidFill>
+                <a:latin typeface="Open Sans"/>
+              </a:rPr>
+              <a:t> è </a:t>
+            </a:r>
+            <a:r>
+              <a:rPr sz="1500" b="0" dirty="0" err="1">
+                <a:solidFill>
+                  <a:srgbClr val="555667"/>
+                </a:solidFill>
+                <a:latin typeface="Open Sans"/>
+              </a:rPr>
+              <a:t>duplicata</a:t>
+            </a:r>
+            <a:r>
+              <a:rPr sz="1500" b="0" dirty="0">
+                <a:solidFill>
+                  <a:srgbClr val="555667"/>
+                </a:solidFill>
+                <a:latin typeface="Open Sans"/>
+              </a:rPr>
+              <a:t> in N </a:t>
+            </a:r>
+            <a:r>
+              <a:rPr sz="1500" b="0" dirty="0" err="1">
+                <a:solidFill>
+                  <a:srgbClr val="555667"/>
+                </a:solidFill>
+                <a:latin typeface="Open Sans"/>
+              </a:rPr>
+              <a:t>posti</a:t>
+            </a:r>
+            <a:r>
+              <a:rPr sz="1500" b="0" dirty="0">
+                <a:solidFill>
+                  <a:srgbClr val="555667"/>
+                </a:solidFill>
+                <a:latin typeface="Open Sans"/>
+              </a:rPr>
+              <a:t>.</a:t>
+            </a:r>
+          </a:p>
+          <a:p>
+            <a:pPr algn="l"/>
+            <a:r>
+              <a:rPr sz="1500" b="0" dirty="0">
+                <a:solidFill>
+                  <a:srgbClr val="555667"/>
+                </a:solidFill>
+                <a:latin typeface="Open Sans"/>
+              </a:rPr>
+              <a:t>E </a:t>
+            </a:r>
+            <a:r>
+              <a:rPr sz="1500" b="0" dirty="0" err="1">
+                <a:solidFill>
+                  <a:srgbClr val="555667"/>
+                </a:solidFill>
+                <a:latin typeface="Open Sans"/>
+              </a:rPr>
+              <a:t>quando</a:t>
+            </a:r>
+            <a:r>
+              <a:rPr sz="1500" b="0" dirty="0">
+                <a:solidFill>
+                  <a:srgbClr val="555667"/>
+                </a:solidFill>
+                <a:latin typeface="Open Sans"/>
+              </a:rPr>
+              <a:t> un controller async </a:t>
+            </a:r>
+            <a:r>
+              <a:rPr sz="1500" b="0" dirty="0" err="1">
+                <a:solidFill>
+                  <a:srgbClr val="555667"/>
+                </a:solidFill>
+                <a:latin typeface="Open Sans"/>
+              </a:rPr>
+              <a:t>lancia</a:t>
+            </a:r>
+            <a:r>
+              <a:rPr sz="1500" b="0" dirty="0">
+                <a:solidFill>
+                  <a:srgbClr val="555667"/>
+                </a:solidFill>
+                <a:latin typeface="Open Sans"/>
+              </a:rPr>
+              <a:t> </a:t>
+            </a:r>
+            <a:r>
+              <a:rPr sz="1500" b="0" dirty="0" err="1">
+                <a:solidFill>
+                  <a:srgbClr val="555667"/>
+                </a:solidFill>
+                <a:latin typeface="Open Sans"/>
+              </a:rPr>
+              <a:t>un'eccezione</a:t>
+            </a:r>
+            <a:r>
+              <a:rPr sz="1500" b="0" dirty="0">
+                <a:solidFill>
+                  <a:srgbClr val="555667"/>
+                </a:solidFill>
+                <a:latin typeface="Open Sans"/>
+              </a:rPr>
+              <a:t> non </a:t>
+            </a:r>
+            <a:r>
+              <a:rPr sz="1500" b="0" dirty="0" err="1">
+                <a:solidFill>
+                  <a:srgbClr val="555667"/>
+                </a:solidFill>
+                <a:latin typeface="Open Sans"/>
+              </a:rPr>
+              <a:t>catturata</a:t>
+            </a:r>
+            <a:r>
+              <a:rPr sz="1500" b="0" dirty="0">
+                <a:solidFill>
+                  <a:srgbClr val="555667"/>
+                </a:solidFill>
+                <a:latin typeface="Open Sans"/>
+              </a:rPr>
+              <a:t>,</a:t>
+            </a:r>
+          </a:p>
+          <a:p>
+            <a:pPr algn="l"/>
+            <a:r>
+              <a:rPr sz="1500" b="0" dirty="0">
+                <a:solidFill>
+                  <a:srgbClr val="555667"/>
+                </a:solidFill>
+                <a:latin typeface="Open Sans"/>
+              </a:rPr>
+              <a:t>Express </a:t>
+            </a:r>
+            <a:r>
+              <a:rPr sz="1500" b="0" dirty="0" err="1">
+                <a:solidFill>
+                  <a:srgbClr val="555667"/>
+                </a:solidFill>
+                <a:latin typeface="Open Sans"/>
+              </a:rPr>
+              <a:t>manda</a:t>
+            </a:r>
+            <a:r>
+              <a:rPr sz="1500" b="0" dirty="0">
+                <a:solidFill>
+                  <a:srgbClr val="555667"/>
+                </a:solidFill>
+                <a:latin typeface="Open Sans"/>
+              </a:rPr>
+              <a:t> HTML </a:t>
+            </a:r>
+            <a:r>
+              <a:rPr sz="1500" b="0" dirty="0" err="1">
+                <a:solidFill>
+                  <a:srgbClr val="555667"/>
+                </a:solidFill>
+                <a:latin typeface="Open Sans"/>
+              </a:rPr>
+              <a:t>brutto</a:t>
+            </a:r>
+            <a:r>
+              <a:rPr sz="1500" b="0" dirty="0">
+                <a:solidFill>
+                  <a:srgbClr val="555667"/>
+                </a:solidFill>
+                <a:latin typeface="Open Sans"/>
+              </a:rPr>
+              <a:t> al client. </a:t>
+            </a:r>
+            <a:r>
+              <a:rPr sz="1500" b="0" dirty="0" err="1">
+                <a:solidFill>
+                  <a:srgbClr val="555667"/>
+                </a:solidFill>
+                <a:latin typeface="Open Sans"/>
+              </a:rPr>
+              <a:t>Soluzione</a:t>
+            </a:r>
+            <a:r>
+              <a:rPr sz="1500" b="0" dirty="0">
+                <a:solidFill>
+                  <a:srgbClr val="555667"/>
+                </a:solidFill>
+                <a:latin typeface="Open Sans"/>
+              </a:rPr>
+              <a:t>: </a:t>
+            </a:r>
+            <a:r>
+              <a:rPr sz="1500" b="0" dirty="0" err="1">
+                <a:solidFill>
+                  <a:srgbClr val="555667"/>
+                </a:solidFill>
+                <a:latin typeface="Open Sans"/>
+              </a:rPr>
+              <a:t>centralizzare</a:t>
+            </a:r>
+            <a:r>
+              <a:rPr sz="1500" b="0" dirty="0">
+                <a:solidFill>
+                  <a:srgbClr val="555667"/>
+                </a:solidFill>
+                <a:latin typeface="Open Sans"/>
+              </a:rPr>
+              <a:t>.</a:t>
             </a:r>
           </a:p>
         </p:txBody>
